--- a/module-05-dijkstra/slides/06-testing-and-swapping.pptx
+++ b/module-05-dijkstra/slides/06-testing-and-swapping.pptx
@@ -3172,7 +3172,7 @@
               </a:defRPr>
             </a:pPr>
             <a:r>
-              <a:t>Module 5: Dijkstra's Algorithm</a:t>
+              <a:t>Module 5: Dijkstra</a:t>
             </a:r>
           </a:p>
         </p:txBody>
@@ -3260,7 +3260,7 @@
               </a:defRPr>
             </a:pPr>
             <a:r>
-              <a:t>Test Dijkstra with no blocked nodes and verify it matches Manhattan output</a:t>
+              <a:t>Write test cases that verify Dijkstra produces correct paths on an obstacle-free grid</a:t>
             </a:r>
           </a:p>
           <a:p>
@@ -3276,7 +3276,7 @@
               </a:defRPr>
             </a:pPr>
             <a:r>
-              <a:t>Test Dijkstra with blocked nodes and verify correct rerouting</a:t>
+              <a:t>Write test cases that verify Dijkstra correctly reroutes around blocked nodes</a:t>
             </a:r>
           </a:p>
           <a:p>
@@ -3292,7 +3292,7 @@
               </a:defRPr>
             </a:pPr>
             <a:r>
-              <a:t>Explain why a shared interface (compute_path returning list of tuples) enables swapping</a:t>
+              <a:t>Explain the shape mismatch between compute_manhattan_path and compute_dijkstra_path</a:t>
             </a:r>
           </a:p>
           <a:p>
@@ -3308,7 +3308,23 @@
               </a:defRPr>
             </a:pPr>
             <a:r>
-              <a:t>Swap Dijkstra into the Module 4 navigation program with minimal code changes</a:t>
+              <a:t>Write a compute_path(algorithm, ...) dispatch function that normalizes the two functions behind one call</a:t>
+            </a:r>
+          </a:p>
+          <a:p>
+            <a:pPr>
+              <a:spcAft>
+                <a:spcPts val="400"/>
+              </a:spcAft>
+              <a:defRPr sz="1600" b="0">
+                <a:solidFill>
+                  <a:srgbClr val="333333"/>
+                </a:solidFill>
+                <a:latin typeface="Calibri"/>
+              </a:defRPr>
+            </a:pPr>
+            <a:r>
+              <a:t>Swap which algorithm a program uses by changing one argument, not rewriting calling code</a:t>
             </a:r>
           </a:p>
         </p:txBody>
@@ -3392,7 +3408,7 @@
               </a:defRPr>
             </a:pPr>
             <a:r>
-              <a:t>Shared interface: why it works (10 min)</a:t>
+              <a:t>The shape mismatch (5 min)</a:t>
             </a:r>
           </a:p>
           <a:p>
@@ -3408,7 +3424,7 @@
               </a:defRPr>
             </a:pPr>
             <a:r>
-              <a:t>Swapping in the Module 4 program (10 min)</a:t>
+              <a:t>Building the dispatch function (10 min)</a:t>
             </a:r>
           </a:p>
           <a:p>
@@ -3424,7 +3440,7 @@
               </a:defRPr>
             </a:pPr>
             <a:r>
-              <a:t>Side-by-side comparison (5 min)</a:t>
+              <a:t>The one-argument swap (10 min)</a:t>
             </a:r>
           </a:p>
           <a:p>
@@ -3605,7 +3621,7 @@
               </a:defRPr>
             </a:pPr>
             <a:r>
-              <a:t>Make a copy of your Module 4 navigation program</a:t>
+              <a:t>Add the compute_path() dispatch function and build_dijkstra_graph()/compute_dijkstra_path() to your Module 4 navigation program</a:t>
             </a:r>
           </a:p>
           <a:p>
@@ -3621,7 +3637,7 @@
               </a:defRPr>
             </a:pPr>
             <a:r>
-              <a:t>Replace Manhattan with Dijkstra:</a:t>
+              <a:t>Change every compute_manhattan_path(position, dest) call to compute_path("dijkstra", position, dest, blocked)</a:t>
             </a:r>
           </a:p>
           <a:p>
@@ -3637,7 +3653,7 @@
               </a:defRPr>
             </a:pPr>
             <a:r>
-              <a:t>Change the import statement</a:t>
+              <a:t>Test with no blocked nodes — verify the robot visits all destinations correctly</a:t>
             </a:r>
           </a:p>
           <a:p>
@@ -3653,7 +3669,7 @@
               </a:defRPr>
             </a:pPr>
             <a:r>
-              <a:t>Change the constructor call, adding a blocked list</a:t>
+              <a:t>Test with blocked nodes — verify the robot takes alternate routes</a:t>
             </a:r>
           </a:p>
           <a:p>
@@ -3669,7 +3685,7 @@
               </a:defRPr>
             </a:pPr>
             <a:r>
-              <a:t>Test with no blocked nodes — verify the robot visits all destinations correctly</a:t>
+              <a:t>Try these scenarios:</a:t>
             </a:r>
           </a:p>
           <a:p>
@@ -3685,7 +3701,7 @@
               </a:defRPr>
             </a:pPr>
             <a:r>
-              <a:t>Test with blocked nodes — verify the robot takes alternate routes</a:t>
+              <a:t>Block one intersection on the direct path</a:t>
             </a:r>
           </a:p>
           <a:p>
@@ -3701,7 +3717,7 @@
               </a:defRPr>
             </a:pPr>
             <a:r>
-              <a:t>Try these scenarios:</a:t>
+              <a:t>Block two adjacent intersections to force a longer detour</a:t>
             </a:r>
           </a:p>
           <a:p>
@@ -3717,7 +3733,7 @@
               </a:defRPr>
             </a:pPr>
             <a:r>
-              <a:t>Block one intersection on the direct path</a:t>
+              <a:t>Block intersections that don't affect any paths (should make no difference)</a:t>
             </a:r>
           </a:p>
           <a:p>
@@ -3725,6 +3741,35 @@
               <a:spcAft>
                 <a:spcPts val="400"/>
               </a:spcAft>
+              <a:defRPr sz="400" b="0">
+                <a:solidFill>
+                  <a:srgbClr val="000000"/>
+                </a:solidFill>
+                <a:latin typeface="Calibri"/>
+              </a:defRPr>
+            </a:pPr>
+          </a:p>
+          <a:p>
+            <a:pPr>
+              <a:spcAft>
+                <a:spcPts val="400"/>
+              </a:spcAft>
+              <a:defRPr sz="2000" b="1">
+                <a:solidFill>
+                  <a:srgbClr val="1B3A5C"/>
+                </a:solidFill>
+                <a:latin typeface="Calibri"/>
+              </a:defRPr>
+            </a:pPr>
+            <a:r>
+              <a:t>Checkpoints:</a:t>
+            </a:r>
+          </a:p>
+          <a:p>
+            <a:pPr>
+              <a:spcAft>
+                <a:spcPts val="400"/>
+              </a:spcAft>
               <a:defRPr sz="1700" b="0">
                 <a:solidFill>
                   <a:srgbClr val="000000"/>
@@ -3733,7 +3778,7 @@
               </a:defRPr>
             </a:pPr>
             <a:r>
-              <a:t>Block two adjacent intersections to force a longer detour</a:t>
+              <a:t>Did you only need to change one line of code to swap pathfinders?</a:t>
             </a:r>
           </a:p>
           <a:p>
@@ -3749,7 +3794,7 @@
               </a:defRPr>
             </a:pPr>
             <a:r>
-              <a:t>Block intersections that don't affect any paths (should make no difference)</a:t>
+              <a:t>Does the robot still visit all destinations correctly?</a:t>
             </a:r>
           </a:p>
           <a:p>
@@ -3757,35 +3802,22 @@
               <a:spcAft>
                 <a:spcPts val="400"/>
               </a:spcAft>
-              <a:defRPr sz="400" b="0">
+              <a:defRPr sz="1700" b="0">
                 <a:solidFill>
                   <a:srgbClr val="000000"/>
                 </a:solidFill>
                 <a:latin typeface="Calibri"/>
               </a:defRPr>
             </a:pPr>
+            <a:r>
+              <a:t>With blocked nodes, does the robot avoid those intersections?</a:t>
+            </a:r>
           </a:p>
           <a:p>
             <a:pPr>
               <a:spcAft>
                 <a:spcPts val="400"/>
               </a:spcAft>
-              <a:defRPr sz="2000" b="1">
-                <a:solidFill>
-                  <a:srgbClr val="1B3A5C"/>
-                </a:solidFill>
-                <a:latin typeface="Calibri"/>
-              </a:defRPr>
-            </a:pPr>
-            <a:r>
-              <a:t>Checkpoints:</a:t>
-            </a:r>
-          </a:p>
-          <a:p>
-            <a:pPr>
-              <a:spcAft>
-                <a:spcPts val="400"/>
-              </a:spcAft>
               <a:defRPr sz="1700" b="0">
                 <a:solidFill>
                   <a:srgbClr val="000000"/>
@@ -3794,55 +3826,7 @@
               </a:defRPr>
             </a:pPr>
             <a:r>
-              <a:t>Did you only need to change 2 lines of code to swap pathfinders?</a:t>
-            </a:r>
-          </a:p>
-          <a:p>
-            <a:pPr>
-              <a:spcAft>
-                <a:spcPts val="400"/>
-              </a:spcAft>
-              <a:defRPr sz="1700" b="0">
-                <a:solidFill>
-                  <a:srgbClr val="000000"/>
-                </a:solidFill>
-                <a:latin typeface="Calibri"/>
-              </a:defRPr>
-            </a:pPr>
-            <a:r>
-              <a:t>Does the robot still visit all destinations correctly?</a:t>
-            </a:r>
-          </a:p>
-          <a:p>
-            <a:pPr>
-              <a:spcAft>
-                <a:spcPts val="400"/>
-              </a:spcAft>
-              <a:defRPr sz="1700" b="0">
-                <a:solidFill>
-                  <a:srgbClr val="000000"/>
-                </a:solidFill>
-                <a:latin typeface="Calibri"/>
-              </a:defRPr>
-            </a:pPr>
-            <a:r>
-              <a:t>With blocked nodes, does the robot avoid those intersections?</a:t>
-            </a:r>
-          </a:p>
-          <a:p>
-            <a:pPr>
-              <a:spcAft>
-                <a:spcPts val="400"/>
-              </a:spcAft>
-              <a:defRPr sz="1700" b="0">
-                <a:solidFill>
-                  <a:srgbClr val="000000"/>
-                </a:solidFill>
-                <a:latin typeface="Calibri"/>
-              </a:defRPr>
-            </a:pPr>
-            <a:r>
-              <a:t>Do both pathfinders produce the same results when nothing is blocked?</a:t>
+              <a:t>Do both pathfinders produce the same-length results when nothing is blocked?</a:t>
             </a:r>
           </a:p>
           <a:p>
@@ -3952,7 +3936,7 @@
               </a:defRPr>
             </a:pPr>
             <a:r>
-              <a:t>Connection to Next Lesson</a:t>
+              <a:t>What's Next</a:t>
             </a:r>
           </a:p>
         </p:txBody>
@@ -3991,7 +3975,7 @@
               </a:defRPr>
             </a:pPr>
             <a:r>
-              <a:t>What you did today:</a:t>
+              <a:t>Today: Tested Dijkstra with and without obstacles, built a compute_path(algorithm, ...) dispatch function, and swapped Dijkstra into the Module 4 program by changing one argument.</a:t>
             </a:r>
           </a:p>
           <a:p>
@@ -3999,6 +3983,35 @@
               <a:spcAft>
                 <a:spcPts val="400"/>
               </a:spcAft>
+              <a:defRPr sz="400" b="0">
+                <a:solidFill>
+                  <a:srgbClr val="000000"/>
+                </a:solidFill>
+                <a:latin typeface="Calibri"/>
+              </a:defRPr>
+            </a:pPr>
+          </a:p>
+          <a:p>
+            <a:pPr>
+              <a:spcAft>
+                <a:spcPts val="400"/>
+              </a:spcAft>
+              <a:defRPr sz="2000" b="1">
+                <a:solidFill>
+                  <a:srgbClr val="1B3A5C"/>
+                </a:solidFill>
+                <a:latin typeface="Calibri"/>
+              </a:defRPr>
+            </a:pPr>
+            <a:r>
+              <a:t>Next lesson (Lesson 7):</a:t>
+            </a:r>
+          </a:p>
+          <a:p>
+            <a:pPr>
+              <a:spcAft>
+                <a:spcPts val="400"/>
+              </a:spcAft>
               <a:defRPr sz="1700" b="0">
                 <a:solidFill>
                   <a:srgbClr val="000000"/>
@@ -4007,7 +4020,7 @@
               </a:defRPr>
             </a:pPr>
             <a:r>
-              <a:t>Tested Dijkstra with and without obstacles</a:t>
+              <a:t>Use the XRP robot's ultrasonic rangefinder to detect real obstacles</a:t>
             </a:r>
           </a:p>
           <a:p>
@@ -4023,7 +4036,7 @@
               </a:defRPr>
             </a:pPr>
             <a:r>
-              <a:t>Verified that Dijkstra matches Manhattan when no obstacles exist</a:t>
+              <a:t>Read distance measurements from the sensor</a:t>
             </a:r>
           </a:p>
           <a:p>
@@ -4039,7 +4052,7 @@
               </a:defRPr>
             </a:pPr>
             <a:r>
-              <a:t>Swapped Dijkstra into the Module 4 program with minimal changes</a:t>
+              <a:t>Decide when to treat an intersection as blocked</a:t>
             </a:r>
           </a:p>
           <a:p>
@@ -4047,22 +4060,35 @@
               <a:spcAft>
                 <a:spcPts val="400"/>
               </a:spcAft>
-              <a:defRPr sz="1700" b="0">
+              <a:defRPr sz="400" b="0">
                 <a:solidFill>
                   <a:srgbClr val="000000"/>
                 </a:solidFill>
                 <a:latin typeface="Calibri"/>
               </a:defRPr>
             </a:pPr>
-            <a:r>
-              <a:t>Understood why a shared interface makes swapping easy</a:t>
-            </a:r>
           </a:p>
           <a:p>
             <a:pPr>
               <a:spcAft>
                 <a:spcPts val="400"/>
               </a:spcAft>
+              <a:defRPr sz="2000" b="1">
+                <a:solidFill>
+                  <a:srgbClr val="1B3A5C"/>
+                </a:solidFill>
+                <a:latin typeface="Calibri"/>
+              </a:defRPr>
+            </a:pPr>
+            <a:r>
+              <a:t>Key insight: Right now, we hard-code the blocked list. Next lesson, the robot will discover blocked intersections on its own using its rangefinder sensor.</a:t>
+            </a:r>
+          </a:p>
+          <a:p>
+            <a:pPr>
+              <a:spcAft>
+                <a:spcPts val="400"/>
+              </a:spcAft>
               <a:defRPr sz="400" b="0">
                 <a:solidFill>
                   <a:srgbClr val="000000"/>
@@ -4084,84 +4110,7 @@
               </a:defRPr>
             </a:pPr>
             <a:r>
-              <a:t>Next lesson (Lesson 7):</a:t>
-            </a:r>
-          </a:p>
-          <a:p>
-            <a:pPr>
-              <a:spcAft>
-                <a:spcPts val="400"/>
-              </a:spcAft>
-              <a:defRPr sz="1700" b="0">
-                <a:solidFill>
-                  <a:srgbClr val="000000"/>
-                </a:solidFill>
-                <a:latin typeface="Calibri"/>
-              </a:defRPr>
-            </a:pPr>
-            <a:r>
-              <a:t>Use the XRP robot's ultrasonic rangefinder to detect real obstacles</a:t>
-            </a:r>
-          </a:p>
-          <a:p>
-            <a:pPr>
-              <a:spcAft>
-                <a:spcPts val="400"/>
-              </a:spcAft>
-              <a:defRPr sz="1700" b="0">
-                <a:solidFill>
-                  <a:srgbClr val="000000"/>
-                </a:solidFill>
-                <a:latin typeface="Calibri"/>
-              </a:defRPr>
-            </a:pPr>
-            <a:r>
-              <a:t>Read distance measurements from the sensor</a:t>
-            </a:r>
-          </a:p>
-          <a:p>
-            <a:pPr>
-              <a:spcAft>
-                <a:spcPts val="400"/>
-              </a:spcAft>
-              <a:defRPr sz="1700" b="0">
-                <a:solidFill>
-                  <a:srgbClr val="000000"/>
-                </a:solidFill>
-                <a:latin typeface="Calibri"/>
-              </a:defRPr>
-            </a:pPr>
-            <a:r>
-              <a:t>Decide when to treat an intersection as blocked</a:t>
-            </a:r>
-          </a:p>
-          <a:p>
-            <a:pPr>
-              <a:spcAft>
-                <a:spcPts val="400"/>
-              </a:spcAft>
-              <a:defRPr sz="400" b="0">
-                <a:solidFill>
-                  <a:srgbClr val="000000"/>
-                </a:solidFill>
-                <a:latin typeface="Calibri"/>
-              </a:defRPr>
-            </a:pPr>
-          </a:p>
-          <a:p>
-            <a:pPr>
-              <a:spcAft>
-                <a:spcPts val="400"/>
-              </a:spcAft>
-              <a:defRPr sz="2000" b="1">
-                <a:solidFill>
-                  <a:srgbClr val="1B3A5C"/>
-                </a:solidFill>
-                <a:latin typeface="Calibri"/>
-              </a:defRPr>
-            </a:pPr>
-            <a:r>
-              <a:t>Key insight: Right now, we hard-code the blocked list. Next lesson, the robot will discover blocked intersections on its own using its rangefinder sensor.</a:t>
+              <a:t>Optional Extension: Courses that also cover classes can see how a shared method signature gives "true polymorphism" -- no dispatch function needed -- see the separate "True Polymorphism with Classes" deck.</a:t>
             </a:r>
           </a:p>
         </p:txBody>
@@ -4258,7 +4207,7 @@
               </a:defRPr>
             </a:pPr>
             <a:r>
-              <a:t>Hook — The Two-Minute Swap</a:t>
+              <a:t>Hook — Would You Trust Untested Code to Drive Your Car?</a:t>
             </a:r>
           </a:p>
         </p:txBody>
@@ -4289,6 +4238,35 @@
               <a:spcAft>
                 <a:spcPts val="400"/>
               </a:spcAft>
+              <a:defRPr sz="2000" b="1">
+                <a:solidFill>
+                  <a:srgbClr val="1B3A5C"/>
+                </a:solidFill>
+                <a:latin typeface="Calibri"/>
+              </a:defRPr>
+            </a:pPr>
+            <a:r>
+              <a:t>Question: "Imagine you wrote the software for a self-driving car. Would you put a passenger in it without testing it first?"</a:t>
+            </a:r>
+          </a:p>
+          <a:p>
+            <a:pPr>
+              <a:spcAft>
+                <a:spcPts val="400"/>
+              </a:spcAft>
+              <a:defRPr sz="400" b="0">
+                <a:solidFill>
+                  <a:srgbClr val="000000"/>
+                </a:solidFill>
+                <a:latin typeface="Calibri"/>
+              </a:defRPr>
+            </a:pPr>
+          </a:p>
+          <a:p>
+            <a:pPr>
+              <a:spcAft>
+                <a:spcPts val="400"/>
+              </a:spcAft>
               <a:defRPr sz="1700" b="0">
                 <a:solidFill>
                   <a:srgbClr val="000000"/>
@@ -4297,7 +4275,7 @@
               </a:defRPr>
             </a:pPr>
             <a:r>
-              <a:t>Imagine you're a mechanic. A customer has a car with a flat tire. You could:</a:t>
+              <a:t>Of course not. You'd test it in simulation, on a closed course, with edge cases and unusual scenarios first.</a:t>
             </a:r>
           </a:p>
           <a:p>
@@ -4305,6 +4283,19 @@
               <a:spcAft>
                 <a:spcPts val="400"/>
               </a:spcAft>
+              <a:defRPr sz="400" b="0">
+                <a:solidFill>
+                  <a:srgbClr val="000000"/>
+                </a:solidFill>
+                <a:latin typeface="Calibri"/>
+              </a:defRPr>
+            </a:pPr>
+          </a:p>
+          <a:p>
+            <a:pPr>
+              <a:spcAft>
+                <a:spcPts val="400"/>
+              </a:spcAft>
               <a:defRPr sz="1700" b="0">
                 <a:solidFill>
                   <a:srgbClr val="000000"/>
@@ -4313,7 +4304,7 @@
               </a:defRPr>
             </a:pPr>
             <a:r>
-              <a:t>Redesign the entire car to handle flat tires</a:t>
+              <a:t>Our robot is the same. We built build_dijkstra_graph() and compute_dijkstra_path(), but we haven't proven they work yet.</a:t>
             </a:r>
           </a:p>
           <a:p>
@@ -4321,35 +4312,19 @@
               <a:spcAft>
                 <a:spcPts val="400"/>
               </a:spcAft>
-              <a:defRPr sz="1700" b="0">
+              <a:defRPr sz="400" b="0">
                 <a:solidFill>
                   <a:srgbClr val="000000"/>
                 </a:solidFill>
                 <a:latin typeface="Calibri"/>
               </a:defRPr>
             </a:pPr>
-            <a:r>
-              <a:t>OR just swap in a new tire that fits the same wheel</a:t>
-            </a:r>
           </a:p>
           <a:p>
             <a:pPr>
               <a:spcAft>
                 <a:spcPts val="400"/>
               </a:spcAft>
-              <a:defRPr sz="400" b="0">
-                <a:solidFill>
-                  <a:srgbClr val="000000"/>
-                </a:solidFill>
-                <a:latin typeface="Calibri"/>
-              </a:defRPr>
-            </a:pPr>
-          </a:p>
-          <a:p>
-            <a:pPr>
-              <a:spcAft>
-                <a:spcPts val="400"/>
-              </a:spcAft>
               <a:defRPr sz="2000" b="1">
                 <a:solidFill>
                   <a:srgbClr val="1B3A5C"/>
@@ -4358,65 +4333,7 @@
               </a:defRPr>
             </a:pPr>
             <a:r>
-              <a:t>Our Navigator class is the car. Manhattan and Dijkstra are the tires.</a:t>
-            </a:r>
-          </a:p>
-          <a:p>
-            <a:pPr>
-              <a:spcAft>
-                <a:spcPts val="400"/>
-              </a:spcAft>
-              <a:defRPr sz="400" b="0">
-                <a:solidFill>
-                  <a:srgbClr val="000000"/>
-                </a:solidFill>
-                <a:latin typeface="Calibri"/>
-              </a:defRPr>
-            </a:pPr>
-          </a:p>
-          <a:p>
-            <a:pPr>
-              <a:spcAft>
-                <a:spcPts val="400"/>
-              </a:spcAft>
-              <a:defRPr sz="1700" b="0">
-                <a:solidFill>
-                  <a:srgbClr val="000000"/>
-                </a:solidFill>
-                <a:latin typeface="Calibri"/>
-              </a:defRPr>
-            </a:pPr>
-            <a:r>
-              <a:t>Because both pathfinders have the same interface — compute_path returning a list of tuples — swapping is quick and painless.</a:t>
-            </a:r>
-          </a:p>
-          <a:p>
-            <a:pPr>
-              <a:spcAft>
-                <a:spcPts val="400"/>
-              </a:spcAft>
-              <a:defRPr sz="400" b="0">
-                <a:solidFill>
-                  <a:srgbClr val="000000"/>
-                </a:solidFill>
-                <a:latin typeface="Calibri"/>
-              </a:defRPr>
-            </a:pPr>
-          </a:p>
-          <a:p>
-            <a:pPr>
-              <a:spcAft>
-                <a:spcPts val="400"/>
-              </a:spcAft>
-              <a:defRPr sz="2000" b="1">
-                <a:solidFill>
-                  <a:srgbClr val="1B3A5C"/>
-                </a:solidFill>
-                <a:latin typeface="Calibri"/>
-              </a:defRPr>
-            </a:pPr>
-            <a:r>
-              <a:t>Today: We'll test Dijkstra thoroughly, then swap it into our Module 4 program. It should take about two minutes.</a:t>
+              <a:t>Today: Test them thoroughly, then make it possible to switch between Manhattan and Dijkstra with a single argument.</a:t>
             </a:r>
           </a:p>
           <a:p>
@@ -4526,73 +4443,21 @@
               </a:defRPr>
             </a:pPr>
             <a:r>
-              <a:t>Test 1 — No Blocked Nodes</a:t>
-            </a:r>
-          </a:p>
-        </p:txBody>
-      </p:sp>
-      <p:sp>
-        <p:nvSpPr>
-          <p:cNvPr id="4" name="TextBox 3"/>
-          <p:cNvSpPr txBox="1"/>
+              <a:t>The Shape Mismatch</a:t>
+            </a:r>
+          </a:p>
+        </p:txBody>
+      </p:sp>
+      <p:sp>
+        <p:nvSpPr>
+          <p:cNvPr id="4" name="Rounded Rectangle 3"/>
+          <p:cNvSpPr/>
           <p:nvPr/>
         </p:nvSpPr>
         <p:spPr>
           <a:xfrm>
             <a:off x="548640" y="1371600"/>
-            <a:ext cx="10972800" cy="365760"/>
-          </a:xfrm>
-          <a:prstGeom prst="rect">
-            <a:avLst/>
-          </a:prstGeom>
-          <a:noFill/>
-        </p:spPr>
-        <p:txBody>
-          <a:bodyPr wrap="square">
-            <a:spAutoFit/>
-          </a:bodyPr>
-          <a:lstStyle/>
-          <a:p>
-            <a:pPr>
-              <a:spcAft>
-                <a:spcPts val="400"/>
-              </a:spcAft>
-              <a:defRPr sz="2000" b="1">
-                <a:solidFill>
-                  <a:srgbClr val="1B3A5C"/>
-                </a:solidFill>
-                <a:latin typeface="Calibri"/>
-              </a:defRPr>
-            </a:pPr>
-            <a:r>
-              <a:t>If nothing is blocked, Dijkstra should find a path the same length as Manhattan.</a:t>
-            </a:r>
-          </a:p>
-          <a:p>
-            <a:pPr>
-              <a:spcAft>
-                <a:spcPts val="400"/>
-              </a:spcAft>
-              <a:defRPr sz="400" b="0">
-                <a:solidFill>
-                  <a:srgbClr val="000000"/>
-                </a:solidFill>
-                <a:latin typeface="Calibri"/>
-              </a:defRPr>
-            </a:pPr>
-          </a:p>
-        </p:txBody>
-      </p:sp>
-      <p:sp>
-        <p:nvSpPr>
-          <p:cNvPr id="5" name="Rounded Rectangle 4"/>
-          <p:cNvSpPr/>
-          <p:nvPr/>
-        </p:nvSpPr>
-        <p:spPr>
-          <a:xfrm>
-            <a:off x="548640" y="1371600"/>
-            <a:ext cx="10972800" cy="3200400"/>
+            <a:ext cx="10972800" cy="731520"/>
           </a:xfrm>
           <a:prstGeom prst="roundRect">
             <a:avLst/>
@@ -4630,14 +4495,14 @@
       </p:sp>
       <p:sp>
         <p:nvSpPr>
-          <p:cNvPr id="6" name="TextBox 5"/>
+          <p:cNvPr id="5" name="TextBox 4"/>
           <p:cNvSpPr txBox="1"/>
           <p:nvPr/>
         </p:nvSpPr>
         <p:spPr>
           <a:xfrm>
             <a:off x="731520" y="1463040"/>
-            <a:ext cx="10607040" cy="3017520"/>
+            <a:ext cx="10607040" cy="548640"/>
           </a:xfrm>
           <a:prstGeom prst="rect">
             <a:avLst/>
@@ -4654,7 +4519,7 @@
               <a:spcAft>
                 <a:spcPts val="100"/>
               </a:spcAft>
-              <a:defRPr sz="1300">
+              <a:defRPr sz="1800">
                 <a:solidFill>
                   <a:srgbClr val="333333"/>
                 </a:solidFill>
@@ -4662,7 +4527,7 @@
               </a:defRPr>
             </a:pPr>
             <a:r>
-              <a:t>from manhattan import Manhattan</a:t>
+              <a:t>compute_manhattan_path(position, destination)         -&gt; path, position NOT included</a:t>
             </a:r>
           </a:p>
           <a:p>
@@ -4670,7 +4535,7 @@
               <a:spcAft>
                 <a:spcPts val="100"/>
               </a:spcAft>
-              <a:defRPr sz="1300">
+              <a:defRPr sz="1800">
                 <a:solidFill>
                   <a:srgbClr val="333333"/>
                 </a:solidFill>
@@ -4678,235 +4543,20 @@
               </a:defRPr>
             </a:pPr>
             <a:r>
-              <a:t>from dijkstra import Dijkstra</a:t>
-            </a:r>
-          </a:p>
-          <a:p>
-            <a:pPr>
-              <a:spcAft>
-                <a:spcPts val="100"/>
-              </a:spcAft>
-              <a:defRPr sz="1300">
-                <a:solidFill>
-                  <a:srgbClr val="333333"/>
-                </a:solidFill>
-                <a:latin typeface="Courier New"/>
-              </a:defRPr>
-            </a:pPr>
-          </a:p>
-          <a:p>
-            <a:pPr>
-              <a:spcAft>
-                <a:spcPts val="100"/>
-              </a:spcAft>
-              <a:defRPr sz="1300">
-                <a:solidFill>
-                  <a:srgbClr val="333333"/>
-                </a:solidFill>
-                <a:latin typeface="Courier New"/>
-              </a:defRPr>
-            </a:pPr>
-            <a:r>
-              <a:t>m = Manhattan((0, 0))</a:t>
-            </a:r>
-          </a:p>
-          <a:p>
-            <a:pPr>
-              <a:spcAft>
-                <a:spcPts val="100"/>
-              </a:spcAft>
-              <a:defRPr sz="1300">
-                <a:solidFill>
-                  <a:srgbClr val="333333"/>
-                </a:solidFill>
-                <a:latin typeface="Courier New"/>
-              </a:defRPr>
-            </a:pPr>
-            <a:r>
-              <a:t>d = Dijkstra((0, 0), [])</a:t>
-            </a:r>
-          </a:p>
-          <a:p>
-            <a:pPr>
-              <a:spcAft>
-                <a:spcPts val="100"/>
-              </a:spcAft>
-              <a:defRPr sz="1300">
-                <a:solidFill>
-                  <a:srgbClr val="333333"/>
-                </a:solidFill>
-                <a:latin typeface="Courier New"/>
-              </a:defRPr>
-            </a:pPr>
-          </a:p>
-          <a:p>
-            <a:pPr>
-              <a:spcAft>
-                <a:spcPts val="100"/>
-              </a:spcAft>
-              <a:defRPr sz="1300">
-                <a:solidFill>
-                  <a:srgbClr val="333333"/>
-                </a:solidFill>
-                <a:latin typeface="Courier New"/>
-              </a:defRPr>
-            </a:pPr>
-            <a:r>
-              <a:t>destinations = [(3, 3), (0, 3), (3, 0), (2, 1)]</a:t>
-            </a:r>
-          </a:p>
-          <a:p>
-            <a:pPr>
-              <a:spcAft>
-                <a:spcPts val="100"/>
-              </a:spcAft>
-              <a:defRPr sz="1300">
-                <a:solidFill>
-                  <a:srgbClr val="333333"/>
-                </a:solidFill>
-                <a:latin typeface="Courier New"/>
-              </a:defRPr>
-            </a:pPr>
-          </a:p>
-          <a:p>
-            <a:pPr>
-              <a:spcAft>
-                <a:spcPts val="100"/>
-              </a:spcAft>
-              <a:defRPr sz="1300">
-                <a:solidFill>
-                  <a:srgbClr val="333333"/>
-                </a:solidFill>
-                <a:latin typeface="Courier New"/>
-              </a:defRPr>
-            </a:pPr>
-            <a:r>
-              <a:t>for dest in destinations:</a:t>
-            </a:r>
-          </a:p>
-          <a:p>
-            <a:pPr>
-              <a:spcAft>
-                <a:spcPts val="100"/>
-              </a:spcAft>
-              <a:defRPr sz="1300">
-                <a:solidFill>
-                  <a:srgbClr val="333333"/>
-                </a:solidFill>
-                <a:latin typeface="Courier New"/>
-              </a:defRPr>
-            </a:pPr>
-            <a:r>
-              <a:t>    m_path = m.compute_path(dest)</a:t>
-            </a:r>
-          </a:p>
-          <a:p>
-            <a:pPr>
-              <a:spcAft>
-                <a:spcPts val="100"/>
-              </a:spcAft>
-              <a:defRPr sz="1300">
-                <a:solidFill>
-                  <a:srgbClr val="333333"/>
-                </a:solidFill>
-                <a:latin typeface="Courier New"/>
-              </a:defRPr>
-            </a:pPr>
-            <a:r>
-              <a:t>    d_path = d.compute_path(dest)</a:t>
-            </a:r>
-          </a:p>
-          <a:p>
-            <a:pPr>
-              <a:spcAft>
-                <a:spcPts val="100"/>
-              </a:spcAft>
-              <a:defRPr sz="1300">
-                <a:solidFill>
-                  <a:srgbClr val="333333"/>
-                </a:solidFill>
-                <a:latin typeface="Courier New"/>
-              </a:defRPr>
-            </a:pPr>
-            <a:r>
-              <a:t>    print(f"To {dest}:")</a:t>
-            </a:r>
-          </a:p>
-          <a:p>
-            <a:pPr>
-              <a:spcAft>
-                <a:spcPts val="100"/>
-              </a:spcAft>
-              <a:defRPr sz="1300">
-                <a:solidFill>
-                  <a:srgbClr val="333333"/>
-                </a:solidFill>
-                <a:latin typeface="Courier New"/>
-              </a:defRPr>
-            </a:pPr>
-            <a:r>
-              <a:t>    print(f"  Manhattan: {m_path}  ({len(m_path)-1} steps)")</a:t>
-            </a:r>
-          </a:p>
-          <a:p>
-            <a:pPr>
-              <a:spcAft>
-                <a:spcPts val="100"/>
-              </a:spcAft>
-              <a:defRPr sz="1300">
-                <a:solidFill>
-                  <a:srgbClr val="333333"/>
-                </a:solidFill>
-                <a:latin typeface="Courier New"/>
-              </a:defRPr>
-            </a:pPr>
-            <a:r>
-              <a:t>    print(f"  Dijkstra:  {d_path}  ({len(d_path)-1} steps)")</a:t>
-            </a:r>
-          </a:p>
-          <a:p>
-            <a:pPr>
-              <a:spcAft>
-                <a:spcPts val="100"/>
-              </a:spcAft>
-              <a:defRPr sz="1300">
-                <a:solidFill>
-                  <a:srgbClr val="333333"/>
-                </a:solidFill>
-                <a:latin typeface="Courier New"/>
-              </a:defRPr>
-            </a:pPr>
-            <a:r>
-              <a:t>    print(f"  Same length? {len(m_path) == len(d_path)}")</a:t>
-            </a:r>
-          </a:p>
-          <a:p>
-            <a:pPr>
-              <a:spcAft>
-                <a:spcPts val="100"/>
-              </a:spcAft>
-              <a:defRPr sz="1300">
-                <a:solidFill>
-                  <a:srgbClr val="333333"/>
-                </a:solidFill>
-                <a:latin typeface="Courier New"/>
-              </a:defRPr>
-            </a:pPr>
-            <a:r>
-              <a:t>    print()</a:t>
-            </a:r>
-          </a:p>
-        </p:txBody>
-      </p:sp>
-      <p:sp>
-        <p:nvSpPr>
-          <p:cNvPr id="7" name="TextBox 6"/>
+              <a:t>compute_dijkstra_path(position, destination, graph)   -&gt; path, position included</a:t>
+            </a:r>
+          </a:p>
+        </p:txBody>
+      </p:sp>
+      <p:sp>
+        <p:nvSpPr>
+          <p:cNvPr id="6" name="TextBox 5"/>
           <p:cNvSpPr txBox="1"/>
           <p:nvPr/>
         </p:nvSpPr>
         <p:spPr>
           <a:xfrm>
-            <a:off x="548640" y="4709160"/>
+            <a:off x="548640" y="2240280"/>
             <a:ext cx="10972800" cy="365760"/>
           </a:xfrm>
           <a:prstGeom prst="rect">
@@ -4924,6 +4574,35 @@
               <a:spcAft>
                 <a:spcPts val="400"/>
               </a:spcAft>
+              <a:defRPr sz="1700" b="0">
+                <a:solidFill>
+                  <a:srgbClr val="000000"/>
+                </a:solidFill>
+                <a:latin typeface="Calibri"/>
+              </a:defRPr>
+            </a:pPr>
+            <a:r>
+              <a:t>These aren't quite interchangeable. Dijkstra needs a graph. And if you compare len() of the two outputs directly, you'll be off by one -- that's not a bug, it's just two different design choices that happened to land differently.</a:t>
+            </a:r>
+          </a:p>
+          <a:p>
+            <a:pPr>
+              <a:spcAft>
+                <a:spcPts val="400"/>
+              </a:spcAft>
+              <a:defRPr sz="400" b="0">
+                <a:solidFill>
+                  <a:srgbClr val="000000"/>
+                </a:solidFill>
+                <a:latin typeface="Calibri"/>
+              </a:defRPr>
+            </a:pPr>
+          </a:p>
+          <a:p>
+            <a:pPr>
+              <a:spcAft>
+                <a:spcPts val="400"/>
+              </a:spcAft>
               <a:defRPr sz="2000" b="1">
                 <a:solidFill>
                   <a:srgbClr val="1B3A5C"/>
@@ -4932,36 +4611,7 @@
               </a:defRPr>
             </a:pPr>
             <a:r>
-              <a:t>Expected: Same number of steps for every destination. The actual nodes in the path may differ, but the length must match.</a:t>
-            </a:r>
-          </a:p>
-          <a:p>
-            <a:pPr>
-              <a:spcAft>
-                <a:spcPts val="400"/>
-              </a:spcAft>
-              <a:defRPr sz="400" b="0">
-                <a:solidFill>
-                  <a:srgbClr val="000000"/>
-                </a:solidFill>
-                <a:latin typeface="Calibri"/>
-              </a:defRPr>
-            </a:pPr>
-          </a:p>
-          <a:p>
-            <a:pPr>
-              <a:spcAft>
-                <a:spcPts val="400"/>
-              </a:spcAft>
-              <a:defRPr sz="1700" b="0">
-                <a:solidFill>
-                  <a:srgbClr val="000000"/>
-                </a:solidFill>
-                <a:latin typeface="Calibri"/>
-              </a:defRPr>
-            </a:pPr>
-            <a:r>
-              <a:t>Why might the paths differ? Manhattan always goes rows-first, columns-second. Dijkstra may choose a different shortest path depending on which node it visits first.</a:t>
+              <a:t>So how do we make the rest of our program not care about this difference?</a:t>
             </a:r>
           </a:p>
           <a:p>
@@ -5071,145 +4721,21 @@
               </a:defRPr>
             </a:pPr>
             <a:r>
-              <a:t>Test 2 — With Blocked Nodes</a:t>
-            </a:r>
-          </a:p>
-        </p:txBody>
-      </p:sp>
-      <p:sp>
-        <p:nvSpPr>
-          <p:cNvPr id="4" name="TextBox 3"/>
-          <p:cNvSpPr txBox="1"/>
+              <a:t>Test 1 — No Obstacles, Step Count Should Match Manhattan</a:t>
+            </a:r>
+          </a:p>
+        </p:txBody>
+      </p:sp>
+      <p:sp>
+        <p:nvSpPr>
+          <p:cNvPr id="4" name="Rounded Rectangle 3"/>
+          <p:cNvSpPr/>
           <p:nvPr/>
         </p:nvSpPr>
         <p:spPr>
           <a:xfrm>
             <a:off x="548640" y="1371600"/>
-            <a:ext cx="10972800" cy="365760"/>
-          </a:xfrm>
-          <a:prstGeom prst="rect">
-            <a:avLst/>
-          </a:prstGeom>
-          <a:noFill/>
-        </p:spPr>
-        <p:txBody>
-          <a:bodyPr wrap="square">
-            <a:spAutoFit/>
-          </a:bodyPr>
-          <a:lstStyle/>
-          <a:p>
-            <a:pPr>
-              <a:defRPr sz="1800" b="1">
-                <a:solidFill>
-                  <a:srgbClr val="1B3A5C"/>
-                </a:solidFill>
-                <a:latin typeface="Calibri"/>
-              </a:defRPr>
-            </a:pPr>
-            <a:r>
-              <a:t>Now the real test. Block some intersections and see Dijkstra route around them.</a:t>
-            </a:r>
-          </a:p>
-        </p:txBody>
-      </p:sp>
-      <p:sp>
-        <p:nvSpPr>
-          <p:cNvPr id="5" name="TextBox 4"/>
-          <p:cNvSpPr txBox="1"/>
-          <p:nvPr/>
-        </p:nvSpPr>
-        <p:spPr>
-          <a:xfrm>
-            <a:off x="548640" y="1645920"/>
-            <a:ext cx="10972800" cy="365760"/>
-          </a:xfrm>
-          <a:prstGeom prst="rect">
-            <a:avLst/>
-          </a:prstGeom>
-          <a:noFill/>
-        </p:spPr>
-        <p:txBody>
-          <a:bodyPr wrap="square">
-            <a:spAutoFit/>
-          </a:bodyPr>
-          <a:lstStyle/>
-          <a:p>
-            <a:pPr>
-              <a:defRPr sz="1800" b="1">
-                <a:solidFill>
-                  <a:srgbClr val="1B3A5C"/>
-                </a:solidFill>
-                <a:latin typeface="Calibri"/>
-              </a:defRPr>
-            </a:pPr>
-            <a:r>
-              <a:t>Verify by hand:</a:t>
-            </a:r>
-          </a:p>
-        </p:txBody>
-      </p:sp>
-      <p:sp>
-        <p:nvSpPr>
-          <p:cNvPr id="6" name="TextBox 5"/>
-          <p:cNvSpPr txBox="1"/>
-          <p:nvPr/>
-        </p:nvSpPr>
-        <p:spPr>
-          <a:xfrm>
-            <a:off x="548640" y="1920240"/>
-            <a:ext cx="10972800" cy="365760"/>
-          </a:xfrm>
-          <a:prstGeom prst="rect">
-            <a:avLst/>
-          </a:prstGeom>
-          <a:noFill/>
-        </p:spPr>
-        <p:txBody>
-          <a:bodyPr wrap="square">
-            <a:spAutoFit/>
-          </a:bodyPr>
-          <a:lstStyle/>
-          <a:p>
-            <a:pPr>
-              <a:defRPr sz="1800" b="1">
-                <a:solidFill>
-                  <a:srgbClr val="1B3A5C"/>
-                </a:solidFill>
-                <a:latin typeface="Calibri"/>
-              </a:defRPr>
-            </a:pPr>
-            <a:r>
-              <a:t>Check: Does the path avoid (1,0) and (1,1)? Does it reach (3,0)? Is it the shortest path around the obstacles?</a:t>
-            </a:r>
-          </a:p>
-          <a:p>
-            <a:pPr>
-              <a:spcAft>
-                <a:spcPts val="400"/>
-              </a:spcAft>
-              <a:defRPr sz="1600" b="0">
-                <a:solidFill>
-                  <a:srgbClr val="000000"/>
-                </a:solidFill>
-                <a:latin typeface="Calibri"/>
-              </a:defRPr>
-            </a:pPr>
-            <a:r>
-              <a:t>Try blocking more nodes. What's the minimum number of blocked nodes that makes (3,3) unreachable from (0,0)?</a:t>
-            </a:r>
-          </a:p>
-        </p:txBody>
-      </p:sp>
-      <p:sp>
-        <p:nvSpPr>
-          <p:cNvPr id="7" name="Rounded Rectangle 6"/>
-          <p:cNvSpPr/>
-          <p:nvPr/>
-        </p:nvSpPr>
-        <p:spPr>
-          <a:xfrm>
-            <a:off x="548640" y="2468880"/>
-            <a:ext cx="5303520" cy="1874519"/>
+            <a:ext cx="10972800" cy="1417320"/>
           </a:xfrm>
           <a:prstGeom prst="roundRect">
             <a:avLst/>
@@ -5247,14 +4773,14 @@
       </p:sp>
       <p:sp>
         <p:nvSpPr>
-          <p:cNvPr id="8" name="TextBox 7"/>
+          <p:cNvPr id="5" name="TextBox 4"/>
           <p:cNvSpPr txBox="1"/>
           <p:nvPr/>
         </p:nvSpPr>
         <p:spPr>
           <a:xfrm>
-            <a:off x="731520" y="2560320"/>
-            <a:ext cx="4937760" cy="1691639"/>
+            <a:off x="731520" y="1463040"/>
+            <a:ext cx="10607040" cy="1234440"/>
           </a:xfrm>
           <a:prstGeom prst="rect">
             <a:avLst/>
@@ -5271,7 +4797,7 @@
               <a:spcAft>
                 <a:spcPts val="100"/>
               </a:spcAft>
-              <a:defRPr sz="1300">
+              <a:defRPr sz="1800">
                 <a:solidFill>
                   <a:srgbClr val="333333"/>
                 </a:solidFill>
@@ -5279,7 +4805,7 @@
               </a:defRPr>
             </a:pPr>
             <a:r>
-              <a:t>blocked = [(1, 0), (1, 1)]</a:t>
+              <a:t>graph = build_dijkstra_graph(4, 4, [])</a:t>
             </a:r>
           </a:p>
           <a:p>
@@ -5287,7 +4813,7 @@
               <a:spcAft>
                 <a:spcPts val="100"/>
               </a:spcAft>
-              <a:defRPr sz="1300">
+              <a:defRPr sz="1800">
                 <a:solidFill>
                   <a:srgbClr val="333333"/>
                 </a:solidFill>
@@ -5295,7 +4821,7 @@
               </a:defRPr>
             </a:pPr>
             <a:r>
-              <a:t>d = Dijkstra((0, 0), blocked)</a:t>
+              <a:t>path = compute_dijkstra_path((0, 0), (3, 3), graph)</a:t>
             </a:r>
           </a:p>
           <a:p>
@@ -5303,20 +4829,23 @@
               <a:spcAft>
                 <a:spcPts val="100"/>
               </a:spcAft>
-              <a:defRPr sz="1300">
+              <a:defRPr sz="1800">
                 <a:solidFill>
                   <a:srgbClr val="333333"/>
                 </a:solidFill>
                 <a:latin typeface="Courier New"/>
               </a:defRPr>
             </a:pPr>
+            <a:r>
+              <a:t>print("Path:", path)</a:t>
+            </a:r>
           </a:p>
           <a:p>
             <a:pPr>
               <a:spcAft>
                 <a:spcPts val="100"/>
               </a:spcAft>
-              <a:defRPr sz="1300">
+              <a:defRPr sz="1800">
                 <a:solidFill>
                   <a:srgbClr val="333333"/>
                 </a:solidFill>
@@ -5324,7 +4853,7 @@
               </a:defRPr>
             </a:pPr>
             <a:r>
-              <a:t>path = d.compute_path((3, 0))</a:t>
+              <a:t>print("Path length:", len(path) - 1, "steps")   # -1: Dijkstra includes the start</a:t>
             </a:r>
           </a:p>
           <a:p>
@@ -5332,7 +4861,7 @@
               <a:spcAft>
                 <a:spcPts val="100"/>
               </a:spcAft>
-              <a:defRPr sz="1300">
+              <a:defRPr sz="1800">
                 <a:solidFill>
                   <a:srgbClr val="333333"/>
                 </a:solidFill>
@@ -5340,82 +4869,21 @@
               </a:defRPr>
             </a:pPr>
             <a:r>
-              <a:t>print("Path:", path)</a:t>
-            </a:r>
-          </a:p>
-          <a:p>
-            <a:pPr>
-              <a:spcAft>
-                <a:spcPts val="100"/>
-              </a:spcAft>
-              <a:defRPr sz="1300">
-                <a:solidFill>
-                  <a:srgbClr val="333333"/>
-                </a:solidFill>
-                <a:latin typeface="Courier New"/>
-              </a:defRPr>
-            </a:pPr>
-            <a:r>
-              <a:t>print("Steps:", len(path) - 1)</a:t>
-            </a:r>
-          </a:p>
-        </p:txBody>
-      </p:sp>
-      <p:sp>
-        <p:nvSpPr>
-          <p:cNvPr id="9" name="Rounded Rectangle 8"/>
-          <p:cNvSpPr/>
+              <a:t>print("Expected steps (Manhattan distance):", 6)</a:t>
+            </a:r>
+          </a:p>
+        </p:txBody>
+      </p:sp>
+      <p:sp>
+        <p:nvSpPr>
+          <p:cNvPr id="6" name="TextBox 5"/>
+          <p:cNvSpPr txBox="1"/>
           <p:nvPr/>
         </p:nvSpPr>
         <p:spPr>
           <a:xfrm>
-            <a:off x="6217920" y="2468880"/>
-            <a:ext cx="5303520" cy="1874519"/>
-          </a:xfrm>
-          <a:prstGeom prst="roundRect">
-            <a:avLst/>
-          </a:prstGeom>
-          <a:solidFill>
-            <a:srgbClr val="F0F0F0"/>
-          </a:solidFill>
-          <a:ln w="12700">
-            <a:solidFill>
-              <a:srgbClr val="999999"/>
-            </a:solidFill>
-          </a:ln>
-        </p:spPr>
-        <p:style>
-          <a:lnRef idx="1">
-            <a:schemeClr val="accent1"/>
-          </a:lnRef>
-          <a:fillRef idx="3">
-            <a:schemeClr val="accent1"/>
-          </a:fillRef>
-          <a:effectRef idx="2">
-            <a:schemeClr val="accent1"/>
-          </a:effectRef>
-          <a:fontRef idx="minor">
-            <a:schemeClr val="lt1"/>
-          </a:fontRef>
-        </p:style>
-        <p:txBody>
-          <a:bodyPr rtlCol="0" anchor="ctr"/>
-          <a:lstStyle/>
-          <a:p>
-            <a:pPr algn="ctr"/>
-          </a:p>
-        </p:txBody>
-      </p:sp>
-      <p:sp>
-        <p:nvSpPr>
-          <p:cNvPr id="10" name="TextBox 9"/>
-          <p:cNvSpPr txBox="1"/>
-          <p:nvPr/>
-        </p:nvSpPr>
-        <p:spPr>
-          <a:xfrm>
-            <a:off x="6400800" y="2560320"/>
-            <a:ext cx="4937760" cy="1691639"/>
+            <a:off x="548640" y="2926080"/>
+            <a:ext cx="10972800" cy="365760"/>
           </a:xfrm>
           <a:prstGeom prst="rect">
             <a:avLst/>
@@ -5430,114 +4898,60 @@
           <a:p>
             <a:pPr>
               <a:spcAft>
-                <a:spcPts val="100"/>
-              </a:spcAft>
-              <a:defRPr sz="1300">
-                <a:solidFill>
-                  <a:srgbClr val="333333"/>
-                </a:solidFill>
-                <a:latin typeface="Courier New"/>
-              </a:defRPr>
-            </a:pPr>
-            <a:r>
-              <a:t>(0,0) --- (0,1) --- (0,2) --- (0,3)</a:t>
-            </a:r>
-          </a:p>
-          <a:p>
-            <a:pPr>
-              <a:spcAft>
-                <a:spcPts val="100"/>
-              </a:spcAft>
-              <a:defRPr sz="1300">
-                <a:solidFill>
-                  <a:srgbClr val="333333"/>
-                </a:solidFill>
-                <a:latin typeface="Courier New"/>
-              </a:defRPr>
-            </a:pPr>
-            <a:r>
-              <a:t>                       |         |</a:t>
-            </a:r>
-          </a:p>
-          <a:p>
-            <a:pPr>
-              <a:spcAft>
-                <a:spcPts val="100"/>
-              </a:spcAft>
-              <a:defRPr sz="1300">
-                <a:solidFill>
-                  <a:srgbClr val="333333"/>
-                </a:solidFill>
-                <a:latin typeface="Courier New"/>
-              </a:defRPr>
-            </a:pPr>
-            <a:r>
-              <a:t>                     (1,2) --- (1,3)</a:t>
-            </a:r>
-          </a:p>
-          <a:p>
-            <a:pPr>
-              <a:spcAft>
-                <a:spcPts val="100"/>
-              </a:spcAft>
-              <a:defRPr sz="1300">
-                <a:solidFill>
-                  <a:srgbClr val="333333"/>
-                </a:solidFill>
-                <a:latin typeface="Courier New"/>
-              </a:defRPr>
-            </a:pPr>
-            <a:r>
-              <a:t>  |                    |         |</a:t>
-            </a:r>
-          </a:p>
-          <a:p>
-            <a:pPr>
-              <a:spcAft>
-                <a:spcPts val="100"/>
-              </a:spcAft>
-              <a:defRPr sz="1300">
-                <a:solidFill>
-                  <a:srgbClr val="333333"/>
-                </a:solidFill>
-                <a:latin typeface="Courier New"/>
-              </a:defRPr>
-            </a:pPr>
-            <a:r>
-              <a:t>(2,0) --- (2,1) --- (2,2) --- (2,3)</a:t>
-            </a:r>
-          </a:p>
-          <a:p>
-            <a:pPr>
-              <a:spcAft>
-                <a:spcPts val="100"/>
-              </a:spcAft>
-              <a:defRPr sz="1300">
-                <a:solidFill>
-                  <a:srgbClr val="333333"/>
-                </a:solidFill>
-                <a:latin typeface="Courier New"/>
-              </a:defRPr>
-            </a:pPr>
-            <a:r>
-              <a:t>  |         |         |         |</a:t>
-            </a:r>
-          </a:p>
-          <a:p>
-            <a:pPr>
-              <a:spcAft>
-                <a:spcPts val="100"/>
-              </a:spcAft>
-              <a:defRPr sz="1300">
-                <a:solidFill>
-                  <a:srgbClr val="333333"/>
-                </a:solidFill>
-                <a:latin typeface="Courier New"/>
-              </a:defRPr>
-            </a:pPr>
-            <a:r>
-              <a:t>(3,0) --- (3,1) --- (3,2) --- (3,3)</a:t>
-            </a:r>
+                <a:spcPts val="400"/>
+              </a:spcAft>
+              <a:defRPr sz="1700" b="0">
+                <a:solidFill>
+                  <a:srgbClr val="000000"/>
+                </a:solidFill>
+                <a:latin typeface="Calibri"/>
+              </a:defRPr>
+            </a:pPr>
+            <a:r>
+              <a:t>Run it. The path length should equal the Manhattan distance: |3-0| + |3-0| = 6.</a:t>
+            </a:r>
+          </a:p>
+          <a:p>
+            <a:pPr>
+              <a:spcAft>
+                <a:spcPts val="400"/>
+              </a:spcAft>
+              <a:defRPr sz="400" b="0">
+                <a:solidFill>
+                  <a:srgbClr val="000000"/>
+                </a:solidFill>
+                <a:latin typeface="Calibri"/>
+              </a:defRPr>
+            </a:pPr>
+          </a:p>
+          <a:p>
+            <a:pPr>
+              <a:spcAft>
+                <a:spcPts val="400"/>
+              </a:spcAft>
+              <a:defRPr sz="2000" b="1">
+                <a:solidFill>
+                  <a:srgbClr val="1B3A5C"/>
+                </a:solidFill>
+                <a:latin typeface="Calibri"/>
+              </a:defRPr>
+            </a:pPr>
+            <a:r>
+              <a:t>Note: The exact path may differ from Manhattan's path (Dijkstra might take a different route of the same length), but the NUMBER of steps must be the same.</a:t>
+            </a:r>
+          </a:p>
+          <a:p>
+            <a:pPr>
+              <a:spcAft>
+                <a:spcPts val="400"/>
+              </a:spcAft>
+              <a:defRPr sz="400" b="0">
+                <a:solidFill>
+                  <a:srgbClr val="000000"/>
+                </a:solidFill>
+                <a:latin typeface="Calibri"/>
+              </a:defRPr>
+            </a:pPr>
           </a:p>
         </p:txBody>
       </p:sp>
@@ -5633,20 +5047,168 @@
               </a:defRPr>
             </a:pPr>
             <a:r>
-              <a:t>The Shared Interface</a:t>
-            </a:r>
-          </a:p>
-        </p:txBody>
-      </p:sp>
-      <p:sp>
-        <p:nvSpPr>
-          <p:cNvPr id="4" name="TextBox 3"/>
-          <p:cNvSpPr txBox="1"/>
+              <a:t>Test 2 — Blocked Node, Dijkstra Should Reroute</a:t>
+            </a:r>
+          </a:p>
+        </p:txBody>
+      </p:sp>
+      <p:sp>
+        <p:nvSpPr>
+          <p:cNvPr id="4" name="Rounded Rectangle 3"/>
+          <p:cNvSpPr/>
           <p:nvPr/>
         </p:nvSpPr>
         <p:spPr>
           <a:xfrm>
             <a:off x="548640" y="1371600"/>
+            <a:ext cx="10972800" cy="1417320"/>
+          </a:xfrm>
+          <a:prstGeom prst="roundRect">
+            <a:avLst/>
+          </a:prstGeom>
+          <a:solidFill>
+            <a:srgbClr val="F0F0F0"/>
+          </a:solidFill>
+          <a:ln w="12700">
+            <a:solidFill>
+              <a:srgbClr val="999999"/>
+            </a:solidFill>
+          </a:ln>
+        </p:spPr>
+        <p:style>
+          <a:lnRef idx="1">
+            <a:schemeClr val="accent1"/>
+          </a:lnRef>
+          <a:fillRef idx="3">
+            <a:schemeClr val="accent1"/>
+          </a:fillRef>
+          <a:effectRef idx="2">
+            <a:schemeClr val="accent1"/>
+          </a:effectRef>
+          <a:fontRef idx="minor">
+            <a:schemeClr val="lt1"/>
+          </a:fontRef>
+        </p:style>
+        <p:txBody>
+          <a:bodyPr rtlCol="0" anchor="ctr"/>
+          <a:lstStyle/>
+          <a:p>
+            <a:pPr algn="ctr"/>
+          </a:p>
+        </p:txBody>
+      </p:sp>
+      <p:sp>
+        <p:nvSpPr>
+          <p:cNvPr id="5" name="TextBox 4"/>
+          <p:cNvSpPr txBox="1"/>
+          <p:nvPr/>
+        </p:nvSpPr>
+        <p:spPr>
+          <a:xfrm>
+            <a:off x="731520" y="1463040"/>
+            <a:ext cx="10607040" cy="1234440"/>
+          </a:xfrm>
+          <a:prstGeom prst="rect">
+            <a:avLst/>
+          </a:prstGeom>
+          <a:noFill/>
+        </p:spPr>
+        <p:txBody>
+          <a:bodyPr wrap="square">
+            <a:spAutoFit/>
+          </a:bodyPr>
+          <a:lstStyle/>
+          <a:p>
+            <a:pPr>
+              <a:spcAft>
+                <a:spcPts val="100"/>
+              </a:spcAft>
+              <a:defRPr sz="1800">
+                <a:solidFill>
+                  <a:srgbClr val="333333"/>
+                </a:solidFill>
+                <a:latin typeface="Courier New"/>
+              </a:defRPr>
+            </a:pPr>
+            <a:r>
+              <a:t>graph_blocked = build_dijkstra_graph(4, 4, [(1, 0)])</a:t>
+            </a:r>
+          </a:p>
+          <a:p>
+            <a:pPr>
+              <a:spcAft>
+                <a:spcPts val="100"/>
+              </a:spcAft>
+              <a:defRPr sz="1800">
+                <a:solidFill>
+                  <a:srgbClr val="333333"/>
+                </a:solidFill>
+                <a:latin typeface="Courier New"/>
+              </a:defRPr>
+            </a:pPr>
+            <a:r>
+              <a:t>path_blocked = compute_dijkstra_path((0, 0), (3, 0), graph_blocked)</a:t>
+            </a:r>
+          </a:p>
+          <a:p>
+            <a:pPr>
+              <a:spcAft>
+                <a:spcPts val="100"/>
+              </a:spcAft>
+              <a:defRPr sz="1800">
+                <a:solidFill>
+                  <a:srgbClr val="333333"/>
+                </a:solidFill>
+                <a:latin typeface="Courier New"/>
+              </a:defRPr>
+            </a:pPr>
+            <a:r>
+              <a:t>print("Path with (1,0) blocked:", path_blocked)</a:t>
+            </a:r>
+          </a:p>
+          <a:p>
+            <a:pPr>
+              <a:spcAft>
+                <a:spcPts val="100"/>
+              </a:spcAft>
+              <a:defRPr sz="1800">
+                <a:solidFill>
+                  <a:srgbClr val="333333"/>
+                </a:solidFill>
+                <a:latin typeface="Courier New"/>
+              </a:defRPr>
+            </a:pPr>
+            <a:r>
+              <a:t>print("Path length:", len(path_blocked) - 1, "steps")</a:t>
+            </a:r>
+          </a:p>
+          <a:p>
+            <a:pPr>
+              <a:spcAft>
+                <a:spcPts val="100"/>
+              </a:spcAft>
+              <a:defRPr sz="1800">
+                <a:solidFill>
+                  <a:srgbClr val="333333"/>
+                </a:solidFill>
+                <a:latin typeface="Courier New"/>
+              </a:defRPr>
+            </a:pPr>
+            <a:r>
+              <a:t>print("Manhattan distance (no obstacles):", 3)</a:t>
+            </a:r>
+          </a:p>
+        </p:txBody>
+      </p:sp>
+      <p:sp>
+        <p:nvSpPr>
+          <p:cNvPr id="6" name="TextBox 5"/>
+          <p:cNvSpPr txBox="1"/>
+          <p:nvPr/>
+        </p:nvSpPr>
+        <p:spPr>
+          <a:xfrm>
+            <a:off x="548640" y="2926080"/>
             <a:ext cx="10972800" cy="365760"/>
           </a:xfrm>
           <a:prstGeom prst="rect">
@@ -5664,518 +5226,15 @@
               <a:spcAft>
                 <a:spcPts val="400"/>
               </a:spcAft>
-              <a:defRPr sz="1800" b="1">
-                <a:solidFill>
-                  <a:srgbClr val="1B3A5C"/>
-                </a:solidFill>
-                <a:latin typeface="Calibri"/>
-              </a:defRPr>
-            </a:pPr>
-            <a:r>
-              <a:t>Both Manhattan and Dijkstra have a compute_path method that returns a list of tuples.</a:t>
-            </a:r>
-          </a:p>
-          <a:p>
-            <a:pPr>
-              <a:spcAft>
-                <a:spcPts val="400"/>
-              </a:spcAft>
-              <a:defRPr sz="400" b="0">
+              <a:defRPr sz="1700" b="0">
                 <a:solidFill>
                   <a:srgbClr val="000000"/>
                 </a:solidFill>
                 <a:latin typeface="Calibri"/>
               </a:defRPr>
             </a:pPr>
-          </a:p>
-        </p:txBody>
-      </p:sp>
-      <p:graphicFrame>
-        <p:nvGraphicFramePr>
-          <p:cNvPr id="5" name="Table 4"/>
-          <p:cNvGraphicFramePr>
-            <a:graphicFrameLocks noGrp="1"/>
-          </p:cNvGraphicFramePr>
-          <p:nvPr/>
-        </p:nvGraphicFramePr>
-        <p:xfrm>
-          <a:off x="914400" y="1371600"/>
-          <a:ext cx="10058400" cy="2194560"/>
-        </p:xfrm>
-        <a:graphic>
-          <a:graphicData uri="http://schemas.openxmlformats.org/drawingml/2006/table">
-            <a:tbl>
-              <a:tblPr firstRow="1" bandRow="1">
-                <a:tableStyleId>{5C22544A-7EE6-4342-B048-85BDC9FD1C3A}</a:tableStyleId>
-              </a:tblPr>
-              <a:tblGrid>
-                <a:gridCol w="3352800"/>
-                <a:gridCol w="3352800"/>
-                <a:gridCol w="3352800"/>
-              </a:tblGrid>
-              <a:tr h="365760">
-                <a:tc>
-                  <a:txBody>
-                    <a:bodyPr/>
-                    <a:lstStyle/>
-                    <a:p>
-                      <a:pPr algn="ctr">
-                        <a:defRPr sz="1400" b="1">
-                          <a:solidFill>
-                            <a:srgbClr val="FFFFFF"/>
-                          </a:solidFill>
-                          <a:latin typeface="Calibri"/>
-                        </a:defRPr>
-                      </a:pPr>
-                      <a:r>
-                        <a:t>Feature</a:t>
-                      </a:r>
-                    </a:p>
-                  </a:txBody>
-                  <a:tcPr>
-                    <a:solidFill>
-                      <a:srgbClr val="2E75B6"/>
-                    </a:solidFill>
-                  </a:tcPr>
-                </a:tc>
-                <a:tc>
-                  <a:txBody>
-                    <a:bodyPr/>
-                    <a:lstStyle/>
-                    <a:p>
-                      <a:pPr algn="ctr">
-                        <a:defRPr sz="1400" b="1">
-                          <a:solidFill>
-                            <a:srgbClr val="FFFFFF"/>
-                          </a:solidFill>
-                          <a:latin typeface="Calibri"/>
-                        </a:defRPr>
-                      </a:pPr>
-                      <a:r>
-                        <a:t>Manhattan</a:t>
-                      </a:r>
-                    </a:p>
-                  </a:txBody>
-                  <a:tcPr>
-                    <a:solidFill>
-                      <a:srgbClr val="2E75B6"/>
-                    </a:solidFill>
-                  </a:tcPr>
-                </a:tc>
-                <a:tc>
-                  <a:txBody>
-                    <a:bodyPr/>
-                    <a:lstStyle/>
-                    <a:p>
-                      <a:pPr algn="ctr">
-                        <a:defRPr sz="1400" b="1">
-                          <a:solidFill>
-                            <a:srgbClr val="FFFFFF"/>
-                          </a:solidFill>
-                          <a:latin typeface="Calibri"/>
-                        </a:defRPr>
-                      </a:pPr>
-                      <a:r>
-                        <a:t>Dijkstra</a:t>
-                      </a:r>
-                    </a:p>
-                  </a:txBody>
-                  <a:tcPr>
-                    <a:solidFill>
-                      <a:srgbClr val="2E75B6"/>
-                    </a:solidFill>
-                  </a:tcPr>
-                </a:tc>
-              </a:tr>
-              <a:tr h="365760">
-                <a:tc>
-                  <a:txBody>
-                    <a:bodyPr/>
-                    <a:lstStyle/>
-                    <a:p>
-                      <a:pPr algn="ctr">
-                        <a:defRPr sz="1300">
-                          <a:latin typeface="Calibri"/>
-                        </a:defRPr>
-                      </a:pPr>
-                      <a:r>
-                        <a:t>Constructor</a:t>
-                      </a:r>
-                    </a:p>
-                  </a:txBody>
-                  <a:tcPr/>
-                </a:tc>
-                <a:tc>
-                  <a:txBody>
-                    <a:bodyPr/>
-                    <a:lstStyle/>
-                    <a:p>
-                      <a:pPr algn="ctr">
-                        <a:defRPr sz="1300">
-                          <a:latin typeface="Calibri"/>
-                        </a:defRPr>
-                      </a:pPr>
-                      <a:r>
-                        <a:t>Manhattan(start)</a:t>
-                      </a:r>
-                    </a:p>
-                  </a:txBody>
-                  <a:tcPr/>
-                </a:tc>
-                <a:tc>
-                  <a:txBody>
-                    <a:bodyPr/>
-                    <a:lstStyle/>
-                    <a:p>
-                      <a:pPr algn="ctr">
-                        <a:defRPr sz="1300">
-                          <a:latin typeface="Calibri"/>
-                        </a:defRPr>
-                      </a:pPr>
-                      <a:r>
-                        <a:t>Dijkstra(start, blocked)</a:t>
-                      </a:r>
-                    </a:p>
-                  </a:txBody>
-                  <a:tcPr/>
-                </a:tc>
-              </a:tr>
-              <a:tr h="365760">
-                <a:tc>
-                  <a:txBody>
-                    <a:bodyPr/>
-                    <a:lstStyle/>
-                    <a:p>
-                      <a:pPr algn="ctr">
-                        <a:defRPr sz="1300">
-                          <a:latin typeface="Calibri"/>
-                        </a:defRPr>
-                      </a:pPr>
-                      <a:r>
-                        <a:t>Method</a:t>
-                      </a:r>
-                    </a:p>
-                  </a:txBody>
-                  <a:tcPr>
-                    <a:solidFill>
-                      <a:srgbClr val="E8F0F8"/>
-                    </a:solidFill>
-                  </a:tcPr>
-                </a:tc>
-                <a:tc>
-                  <a:txBody>
-                    <a:bodyPr/>
-                    <a:lstStyle/>
-                    <a:p>
-                      <a:pPr algn="ctr">
-                        <a:defRPr sz="1300">
-                          <a:latin typeface="Calibri"/>
-                        </a:defRPr>
-                      </a:pPr>
-                      <a:r>
-                        <a:t>compute_path(dest)</a:t>
-                      </a:r>
-                    </a:p>
-                  </a:txBody>
-                  <a:tcPr>
-                    <a:solidFill>
-                      <a:srgbClr val="E8F0F8"/>
-                    </a:solidFill>
-                  </a:tcPr>
-                </a:tc>
-                <a:tc>
-                  <a:txBody>
-                    <a:bodyPr/>
-                    <a:lstStyle/>
-                    <a:p>
-                      <a:pPr algn="ctr">
-                        <a:defRPr sz="1300">
-                          <a:latin typeface="Calibri"/>
-                        </a:defRPr>
-                      </a:pPr>
-                      <a:r>
-                        <a:t>compute_path(dest)</a:t>
-                      </a:r>
-                    </a:p>
-                  </a:txBody>
-                  <a:tcPr>
-                    <a:solidFill>
-                      <a:srgbClr val="E8F0F8"/>
-                    </a:solidFill>
-                  </a:tcPr>
-                </a:tc>
-              </a:tr>
-              <a:tr h="365760">
-                <a:tc>
-                  <a:txBody>
-                    <a:bodyPr/>
-                    <a:lstStyle/>
-                    <a:p>
-                      <a:pPr algn="ctr">
-                        <a:defRPr sz="1300">
-                          <a:latin typeface="Calibri"/>
-                        </a:defRPr>
-                      </a:pPr>
-                      <a:r>
-                        <a:t>Returns</a:t>
-                      </a:r>
-                    </a:p>
-                  </a:txBody>
-                  <a:tcPr/>
-                </a:tc>
-                <a:tc>
-                  <a:txBody>
-                    <a:bodyPr/>
-                    <a:lstStyle/>
-                    <a:p>
-                      <a:pPr algn="ctr">
-                        <a:defRPr sz="1300">
-                          <a:latin typeface="Calibri"/>
-                        </a:defRPr>
-                      </a:pPr>
-                      <a:r>
-                        <a:t>list of tuples</a:t>
-                      </a:r>
-                    </a:p>
-                  </a:txBody>
-                  <a:tcPr/>
-                </a:tc>
-                <a:tc>
-                  <a:txBody>
-                    <a:bodyPr/>
-                    <a:lstStyle/>
-                    <a:p>
-                      <a:pPr algn="ctr">
-                        <a:defRPr sz="1300">
-                          <a:latin typeface="Calibri"/>
-                        </a:defRPr>
-                      </a:pPr>
-                      <a:r>
-                        <a:t>list of tuples</a:t>
-                      </a:r>
-                    </a:p>
-                  </a:txBody>
-                  <a:tcPr/>
-                </a:tc>
-              </a:tr>
-              <a:tr h="365760">
-                <a:tc>
-                  <a:txBody>
-                    <a:bodyPr/>
-                    <a:lstStyle/>
-                    <a:p>
-                      <a:pPr algn="ctr">
-                        <a:defRPr sz="1300">
-                          <a:latin typeface="Calibri"/>
-                        </a:defRPr>
-                      </a:pPr>
-                      <a:r>
-                        <a:t>Handles obstacles</a:t>
-                      </a:r>
-                    </a:p>
-                  </a:txBody>
-                  <a:tcPr>
-                    <a:solidFill>
-                      <a:srgbClr val="E8F0F8"/>
-                    </a:solidFill>
-                  </a:tcPr>
-                </a:tc>
-                <a:tc>
-                  <a:txBody>
-                    <a:bodyPr/>
-                    <a:lstStyle/>
-                    <a:p>
-                      <a:pPr algn="ctr">
-                        <a:defRPr sz="1300">
-                          <a:latin typeface="Calibri"/>
-                        </a:defRPr>
-                      </a:pPr>
-                      <a:r>
-                        <a:t>No</a:t>
-                      </a:r>
-                    </a:p>
-                  </a:txBody>
-                  <a:tcPr>
-                    <a:solidFill>
-                      <a:srgbClr val="E8F0F8"/>
-                    </a:solidFill>
-                  </a:tcPr>
-                </a:tc>
-                <a:tc>
-                  <a:txBody>
-                    <a:bodyPr/>
-                    <a:lstStyle/>
-                    <a:p>
-                      <a:pPr algn="ctr">
-                        <a:defRPr sz="1300">
-                          <a:latin typeface="Calibri"/>
-                        </a:defRPr>
-                      </a:pPr>
-                      <a:r>
-                        <a:t>Yes</a:t>
-                      </a:r>
-                    </a:p>
-                  </a:txBody>
-                  <a:tcPr>
-                    <a:solidFill>
-                      <a:srgbClr val="E8F0F8"/>
-                    </a:solidFill>
-                  </a:tcPr>
-                </a:tc>
-              </a:tr>
-              <a:tr h="365760">
-                <a:tc>
-                  <a:txBody>
-                    <a:bodyPr/>
-                    <a:lstStyle/>
-                    <a:p>
-                      <a:pPr algn="ctr">
-                        <a:defRPr sz="1300">
-                          <a:latin typeface="Calibri"/>
-                        </a:defRPr>
-                      </a:pPr>
-                      <a:r>
-                        <a:t>Path format</a:t>
-                      </a:r>
-                    </a:p>
-                  </a:txBody>
-                  <a:tcPr/>
-                </a:tc>
-                <a:tc>
-                  <a:txBody>
-                    <a:bodyPr/>
-                    <a:lstStyle/>
-                    <a:p>
-                      <a:pPr algn="ctr">
-                        <a:defRPr sz="1300">
-                          <a:latin typeface="Calibri"/>
-                        </a:defRPr>
-                      </a:pPr>
-                      <a:r>
-                        <a:t>[(0,0), (1,0), ...]</a:t>
-                      </a:r>
-                    </a:p>
-                  </a:txBody>
-                  <a:tcPr/>
-                </a:tc>
-                <a:tc>
-                  <a:txBody>
-                    <a:bodyPr/>
-                    <a:lstStyle/>
-                    <a:p>
-                      <a:pPr algn="ctr">
-                        <a:defRPr sz="1300">
-                          <a:latin typeface="Calibri"/>
-                        </a:defRPr>
-                      </a:pPr>
-                      <a:r>
-                        <a:t>[(0,0), (0,1), ...]</a:t>
-                      </a:r>
-                    </a:p>
-                  </a:txBody>
-                  <a:tcPr/>
-                </a:tc>
-              </a:tr>
-            </a:tbl>
-          </a:graphicData>
-        </a:graphic>
-      </p:graphicFrame>
-      <p:sp>
-        <p:nvSpPr>
-          <p:cNvPr id="6" name="TextBox 5"/>
-          <p:cNvSpPr txBox="1"/>
-          <p:nvPr/>
-        </p:nvSpPr>
-        <p:spPr>
-          <a:xfrm>
-            <a:off x="548640" y="3749040"/>
-            <a:ext cx="10972800" cy="365760"/>
-          </a:xfrm>
-          <a:prstGeom prst="rect">
-            <a:avLst/>
-          </a:prstGeom>
-          <a:noFill/>
-        </p:spPr>
-        <p:txBody>
-          <a:bodyPr wrap="square">
-            <a:spAutoFit/>
-          </a:bodyPr>
-          <a:lstStyle/>
-          <a:p>
-            <a:pPr>
-              <a:spcAft>
-                <a:spcPts val="400"/>
-              </a:spcAft>
-              <a:defRPr sz="1800" b="1">
-                <a:solidFill>
-                  <a:srgbClr val="1B3A5C"/>
-                </a:solidFill>
-                <a:latin typeface="Calibri"/>
-              </a:defRPr>
-            </a:pPr>
-            <a:r>
-              <a:t>The Navigator class only cares about:</a:t>
-            </a:r>
-          </a:p>
-          <a:p>
-            <a:pPr>
-              <a:spcAft>
-                <a:spcPts val="400"/>
-              </a:spcAft>
-              <a:defRPr sz="1600" b="0">
-                <a:solidFill>
-                  <a:srgbClr val="000000"/>
-                </a:solidFill>
-                <a:latin typeface="Calibri"/>
-              </a:defRPr>
-            </a:pPr>
-            <a:r>
-              <a:t>Calling compute_path(destination) on the pathfinder</a:t>
-            </a:r>
-          </a:p>
-          <a:p>
-            <a:pPr>
-              <a:spcAft>
-                <a:spcPts val="400"/>
-              </a:spcAft>
-              <a:defRPr sz="1600" b="0">
-                <a:solidFill>
-                  <a:srgbClr val="000000"/>
-                </a:solidFill>
-                <a:latin typeface="Calibri"/>
-              </a:defRPr>
-            </a:pPr>
-            <a:r>
-              <a:t>Getting back a list of tuples representing the path</a:t>
-            </a:r>
-          </a:p>
-          <a:p>
-            <a:pPr>
-              <a:spcAft>
-                <a:spcPts val="400"/>
-              </a:spcAft>
-              <a:defRPr sz="400" b="0">
-                <a:solidFill>
-                  <a:srgbClr val="000000"/>
-                </a:solidFill>
-                <a:latin typeface="Calibri"/>
-              </a:defRPr>
-            </a:pPr>
-          </a:p>
-          <a:p>
-            <a:pPr>
-              <a:spcAft>
-                <a:spcPts val="400"/>
-              </a:spcAft>
-              <a:defRPr sz="1600" b="0">
-                <a:solidFill>
-                  <a:srgbClr val="000000"/>
-                </a:solidFill>
-                <a:latin typeface="Calibri"/>
-              </a:defRPr>
-            </a:pPr>
-            <a:r>
-              <a:t>Navigator doesn't know or care whether Manhattan or Dijkstra computed the path. This is the power of a shared interface.</a:t>
+            <a:r>
+              <a:t>Run it. The path should avoid (1, 0) entirely, and the path length should be longer than the Manhattan distance of 3.</a:t>
             </a:r>
           </a:p>
           <a:p>
@@ -6285,7 +5344,7 @@
               </a:defRPr>
             </a:pPr>
             <a:r>
-              <a:t>Swapping in the Module 4 Program</a:t>
+              <a:t>Building the Dispatch Function</a:t>
             </a:r>
           </a:p>
         </p:txBody>
@@ -6313,7 +5372,10 @@
           <a:lstStyle/>
           <a:p>
             <a:pPr>
-              <a:defRPr sz="1800" b="1">
+              <a:spcAft>
+                <a:spcPts val="400"/>
+              </a:spcAft>
+              <a:defRPr sz="2000" b="1">
                 <a:solidFill>
                   <a:srgbClr val="1B3A5C"/>
                 </a:solidFill>
@@ -6321,93 +5383,34 @@
               </a:defRPr>
             </a:pPr>
             <a:r>
-              <a:t>Your Module 4 program probably looks something like this:</a:t>
-            </a:r>
-          </a:p>
-        </p:txBody>
-      </p:sp>
-      <p:sp>
-        <p:nvSpPr>
-          <p:cNvPr id="5" name="TextBox 4"/>
-          <p:cNvSpPr txBox="1"/>
+              <a:t>One function that hides both algorithms' quirks behind a single, consistent call:</a:t>
+            </a:r>
+          </a:p>
+          <a:p>
+            <a:pPr>
+              <a:spcAft>
+                <a:spcPts val="400"/>
+              </a:spcAft>
+              <a:defRPr sz="400" b="0">
+                <a:solidFill>
+                  <a:srgbClr val="000000"/>
+                </a:solidFill>
+                <a:latin typeface="Calibri"/>
+              </a:defRPr>
+            </a:pPr>
+          </a:p>
+        </p:txBody>
+      </p:sp>
+      <p:sp>
+        <p:nvSpPr>
+          <p:cNvPr id="5" name="Rounded Rectangle 4"/>
+          <p:cNvSpPr/>
           <p:nvPr/>
         </p:nvSpPr>
         <p:spPr>
           <a:xfrm>
             <a:off x="548640" y="1645920"/>
-            <a:ext cx="10972800" cy="365760"/>
-          </a:xfrm>
-          <a:prstGeom prst="rect">
-            <a:avLst/>
-          </a:prstGeom>
-          <a:noFill/>
-        </p:spPr>
-        <p:txBody>
-          <a:bodyPr wrap="square">
-            <a:spAutoFit/>
-          </a:bodyPr>
-          <a:lstStyle/>
-          <a:p>
-            <a:pPr>
-              <a:defRPr sz="1800" b="1">
-                <a:solidFill>
-                  <a:srgbClr val="1B3A5C"/>
-                </a:solidFill>
-                <a:latin typeface="Calibri"/>
-              </a:defRPr>
-            </a:pPr>
-            <a:r>
-              <a:t>To swap in Dijkstra, change just two lines:</a:t>
-            </a:r>
-          </a:p>
-        </p:txBody>
-      </p:sp>
-      <p:sp>
-        <p:nvSpPr>
-          <p:cNvPr id="6" name="TextBox 5"/>
-          <p:cNvSpPr txBox="1"/>
-          <p:nvPr/>
-        </p:nvSpPr>
-        <p:spPr>
-          <a:xfrm>
-            <a:off x="548640" y="1920240"/>
-            <a:ext cx="10972800" cy="365760"/>
-          </a:xfrm>
-          <a:prstGeom prst="rect">
-            <a:avLst/>
-          </a:prstGeom>
-          <a:noFill/>
-        </p:spPr>
-        <p:txBody>
-          <a:bodyPr wrap="square">
-            <a:spAutoFit/>
-          </a:bodyPr>
-          <a:lstStyle/>
-          <a:p>
-            <a:pPr>
-              <a:defRPr sz="1600" b="0">
-                <a:solidFill>
-                  <a:srgbClr val="000000"/>
-                </a:solidFill>
-                <a:latin typeface="Calibri"/>
-              </a:defRPr>
-            </a:pPr>
-            <a:r>
-              <a:t>That's it. The Navigator code, the destination list, and the go_to calls all stay exactly the same.</a:t>
-            </a:r>
-          </a:p>
-        </p:txBody>
-      </p:sp>
-      <p:sp>
-        <p:nvSpPr>
-          <p:cNvPr id="7" name="Rounded Rectangle 6"/>
-          <p:cNvSpPr/>
-          <p:nvPr/>
-        </p:nvSpPr>
-        <p:spPr>
-          <a:xfrm>
-            <a:off x="548640" y="2194560"/>
-            <a:ext cx="5303520" cy="2331720"/>
+            <a:ext cx="10972800" cy="3840480"/>
           </a:xfrm>
           <a:prstGeom prst="roundRect">
             <a:avLst/>
@@ -6445,14 +5448,14 @@
       </p:sp>
       <p:sp>
         <p:nvSpPr>
-          <p:cNvPr id="8" name="TextBox 7"/>
+          <p:cNvPr id="6" name="TextBox 5"/>
           <p:cNvSpPr txBox="1"/>
           <p:nvPr/>
         </p:nvSpPr>
         <p:spPr>
           <a:xfrm>
-            <a:off x="731520" y="2286000"/>
-            <a:ext cx="4937760" cy="2148840"/>
+            <a:off x="731520" y="1737360"/>
+            <a:ext cx="10607040" cy="3657600"/>
           </a:xfrm>
           <a:prstGeom prst="rect">
             <a:avLst/>
@@ -6469,7 +5472,7 @@
               <a:spcAft>
                 <a:spcPts val="100"/>
               </a:spcAft>
-              <a:defRPr sz="1300">
+              <a:defRPr sz="1800">
                 <a:solidFill>
                   <a:srgbClr val="333333"/>
                 </a:solidFill>
@@ -6477,7 +5480,7 @@
               </a:defRPr>
             </a:pPr>
             <a:r>
-              <a:t>from manhattan import Manhattan</a:t>
+              <a:t>def compute_path(algorithm, position, destination, blocked):</a:t>
             </a:r>
           </a:p>
           <a:p>
@@ -6485,7 +5488,7 @@
               <a:spcAft>
                 <a:spcPts val="100"/>
               </a:spcAft>
-              <a:defRPr sz="1300">
+              <a:defRPr sz="1800">
                 <a:solidFill>
                   <a:srgbClr val="333333"/>
                 </a:solidFill>
@@ -6493,7 +5496,7 @@
               </a:defRPr>
             </a:pPr>
             <a:r>
-              <a:t>from navigator import Navigator</a:t>
+              <a:t>    """Compute a path using the named algorithm.</a:t>
             </a:r>
           </a:p>
           <a:p>
@@ -6501,7 +5504,7 @@
               <a:spcAft>
                 <a:spcPts val="100"/>
               </a:spcAft>
-              <a:defRPr sz="1300">
+              <a:defRPr sz="1800">
                 <a:solidFill>
                   <a:srgbClr val="333333"/>
                 </a:solidFill>
@@ -6514,7 +5517,7 @@
               <a:spcAft>
                 <a:spcPts val="100"/>
               </a:spcAft>
-              <a:defRPr sz="1300">
+              <a:defRPr sz="1800">
                 <a:solidFill>
                   <a:srgbClr val="333333"/>
                 </a:solidFill>
@@ -6522,7 +5525,7 @@
               </a:defRPr>
             </a:pPr>
             <a:r>
-              <a:t>pathfinder = Manhattan((0, 0))</a:t>
+              <a:t>    algorithm:   "manhattan" or "dijkstra"</a:t>
             </a:r>
           </a:p>
           <a:p>
@@ -6530,7 +5533,7 @@
               <a:spcAft>
                 <a:spcPts val="100"/>
               </a:spcAft>
-              <a:defRPr sz="1300">
+              <a:defRPr sz="1800">
                 <a:solidFill>
                   <a:srgbClr val="333333"/>
                 </a:solidFill>
@@ -6538,7 +5541,7 @@
               </a:defRPr>
             </a:pPr>
             <a:r>
-              <a:t>nav = Navigator(pathfinder)</a:t>
+              <a:t>    position:    (row, col) tuple, current position</a:t>
             </a:r>
           </a:p>
           <a:p>
@@ -6546,20 +5549,23 @@
               <a:spcAft>
                 <a:spcPts val="100"/>
               </a:spcAft>
-              <a:defRPr sz="1300">
+              <a:defRPr sz="1800">
                 <a:solidFill>
                   <a:srgbClr val="333333"/>
                 </a:solidFill>
                 <a:latin typeface="Courier New"/>
               </a:defRPr>
             </a:pPr>
+            <a:r>
+              <a:t>    destination: (row, col) tuple, target</a:t>
+            </a:r>
           </a:p>
           <a:p>
             <a:pPr>
               <a:spcAft>
                 <a:spcPts val="100"/>
               </a:spcAft>
-              <a:defRPr sz="1300">
+              <a:defRPr sz="1800">
                 <a:solidFill>
                   <a:srgbClr val="333333"/>
                 </a:solidFill>
@@ -6567,7 +5573,7 @@
               </a:defRPr>
             </a:pPr>
             <a:r>
-              <a:t>destinations = [(2, 3), (0, 1), (3, 3)]</a:t>
+              <a:t>    blocked:     list of blocked (row, col) tuples (ignored by manhattan)</a:t>
             </a:r>
           </a:p>
           <a:p>
@@ -6575,23 +5581,20 @@
               <a:spcAft>
                 <a:spcPts val="100"/>
               </a:spcAft>
-              <a:defRPr sz="1300">
+              <a:defRPr sz="1800">
                 <a:solidFill>
                   <a:srgbClr val="333333"/>
                 </a:solidFill>
                 <a:latin typeface="Courier New"/>
               </a:defRPr>
             </a:pPr>
-            <a:r>
-              <a:t>for dest in destinations:</a:t>
-            </a:r>
           </a:p>
           <a:p>
             <a:pPr>
               <a:spcAft>
                 <a:spcPts val="100"/>
               </a:spcAft>
-              <a:defRPr sz="1300">
+              <a:defRPr sz="1800">
                 <a:solidFill>
                   <a:srgbClr val="333333"/>
                 </a:solidFill>
@@ -6599,66 +5602,149 @@
               </a:defRPr>
             </a:pPr>
             <a:r>
-              <a:t>    nav.go_to(dest)</a:t>
-            </a:r>
-          </a:p>
-        </p:txBody>
-      </p:sp>
-      <p:sp>
-        <p:nvSpPr>
-          <p:cNvPr id="9" name="Rounded Rectangle 8"/>
-          <p:cNvSpPr/>
+              <a:t>    Returns a list of (row, col) tuples, NOT including position,</a:t>
+            </a:r>
+          </a:p>
+          <a:p>
+            <a:pPr>
+              <a:spcAft>
+                <a:spcPts val="100"/>
+              </a:spcAft>
+              <a:defRPr sz="1800">
+                <a:solidFill>
+                  <a:srgbClr val="333333"/>
+                </a:solidFill>
+                <a:latin typeface="Courier New"/>
+              </a:defRPr>
+            </a:pPr>
+            <a:r>
+              <a:t>    no matter which algorithm computed it.</a:t>
+            </a:r>
+          </a:p>
+          <a:p>
+            <a:pPr>
+              <a:spcAft>
+                <a:spcPts val="100"/>
+              </a:spcAft>
+              <a:defRPr sz="1800">
+                <a:solidFill>
+                  <a:srgbClr val="333333"/>
+                </a:solidFill>
+                <a:latin typeface="Courier New"/>
+              </a:defRPr>
+            </a:pPr>
+            <a:r>
+              <a:t>    """</a:t>
+            </a:r>
+          </a:p>
+          <a:p>
+            <a:pPr>
+              <a:spcAft>
+                <a:spcPts val="100"/>
+              </a:spcAft>
+              <a:defRPr sz="1800">
+                <a:solidFill>
+                  <a:srgbClr val="333333"/>
+                </a:solidFill>
+                <a:latin typeface="Courier New"/>
+              </a:defRPr>
+            </a:pPr>
+            <a:r>
+              <a:t>    if algorithm == "manhattan":</a:t>
+            </a:r>
+          </a:p>
+          <a:p>
+            <a:pPr>
+              <a:spcAft>
+                <a:spcPts val="100"/>
+              </a:spcAft>
+              <a:defRPr sz="1800">
+                <a:solidFill>
+                  <a:srgbClr val="333333"/>
+                </a:solidFill>
+                <a:latin typeface="Courier New"/>
+              </a:defRPr>
+            </a:pPr>
+            <a:r>
+              <a:t>        return compute_manhattan_path(position, destination)</a:t>
+            </a:r>
+          </a:p>
+          <a:p>
+            <a:pPr>
+              <a:spcAft>
+                <a:spcPts val="100"/>
+              </a:spcAft>
+              <a:defRPr sz="1800">
+                <a:solidFill>
+                  <a:srgbClr val="333333"/>
+                </a:solidFill>
+                <a:latin typeface="Courier New"/>
+              </a:defRPr>
+            </a:pPr>
+            <a:r>
+              <a:t>    else:</a:t>
+            </a:r>
+          </a:p>
+          <a:p>
+            <a:pPr>
+              <a:spcAft>
+                <a:spcPts val="100"/>
+              </a:spcAft>
+              <a:defRPr sz="1800">
+                <a:solidFill>
+                  <a:srgbClr val="333333"/>
+                </a:solidFill>
+                <a:latin typeface="Courier New"/>
+              </a:defRPr>
+            </a:pPr>
+            <a:r>
+              <a:t>        graph = build_dijkstra_graph(4, 4, blocked)</a:t>
+            </a:r>
+          </a:p>
+          <a:p>
+            <a:pPr>
+              <a:spcAft>
+                <a:spcPts val="100"/>
+              </a:spcAft>
+              <a:defRPr sz="1800">
+                <a:solidFill>
+                  <a:srgbClr val="333333"/>
+                </a:solidFill>
+                <a:latin typeface="Courier New"/>
+              </a:defRPr>
+            </a:pPr>
+            <a:r>
+              <a:t>        path = compute_dijkstra_path(position, destination, graph)</a:t>
+            </a:r>
+          </a:p>
+          <a:p>
+            <a:pPr>
+              <a:spcAft>
+                <a:spcPts val="100"/>
+              </a:spcAft>
+              <a:defRPr sz="1800">
+                <a:solidFill>
+                  <a:srgbClr val="333333"/>
+                </a:solidFill>
+                <a:latin typeface="Courier New"/>
+              </a:defRPr>
+            </a:pPr>
+            <a:r>
+              <a:t>        return path[1:]  # drop the start position to match Manhattan's shape</a:t>
+            </a:r>
+          </a:p>
+        </p:txBody>
+      </p:sp>
+      <p:sp>
+        <p:nvSpPr>
+          <p:cNvPr id="7" name="TextBox 6"/>
+          <p:cNvSpPr txBox="1"/>
           <p:nvPr/>
         </p:nvSpPr>
         <p:spPr>
           <a:xfrm>
-            <a:off x="6217920" y="2194560"/>
-            <a:ext cx="5303520" cy="2331720"/>
-          </a:xfrm>
-          <a:prstGeom prst="roundRect">
-            <a:avLst/>
-          </a:prstGeom>
-          <a:solidFill>
-            <a:srgbClr val="F0F0F0"/>
-          </a:solidFill>
-          <a:ln w="12700">
-            <a:solidFill>
-              <a:srgbClr val="999999"/>
-            </a:solidFill>
-          </a:ln>
-        </p:spPr>
-        <p:style>
-          <a:lnRef idx="1">
-            <a:schemeClr val="accent1"/>
-          </a:lnRef>
-          <a:fillRef idx="3">
-            <a:schemeClr val="accent1"/>
-          </a:fillRef>
-          <a:effectRef idx="2">
-            <a:schemeClr val="accent1"/>
-          </a:effectRef>
-          <a:fontRef idx="minor">
-            <a:schemeClr val="lt1"/>
-          </a:fontRef>
-        </p:style>
-        <p:txBody>
-          <a:bodyPr rtlCol="0" anchor="ctr"/>
-          <a:lstStyle/>
-          <a:p>
-            <a:pPr algn="ctr"/>
-          </a:p>
-        </p:txBody>
-      </p:sp>
-      <p:sp>
-        <p:nvSpPr>
-          <p:cNvPr id="10" name="TextBox 9"/>
-          <p:cNvSpPr txBox="1"/>
-          <p:nvPr/>
-        </p:nvSpPr>
-        <p:spPr>
-          <a:xfrm>
-            <a:off x="6400800" y="2286000"/>
-            <a:ext cx="4937760" cy="2148840"/>
+            <a:off x="548640" y="5623560"/>
+            <a:ext cx="10972800" cy="365760"/>
           </a:xfrm>
           <a:prstGeom prst="rect">
             <a:avLst/>
@@ -6673,140 +5759,31 @@
           <a:p>
             <a:pPr>
               <a:spcAft>
-                <a:spcPts val="100"/>
-              </a:spcAft>
-              <a:defRPr sz="1300">
-                <a:solidFill>
-                  <a:srgbClr val="333333"/>
-                </a:solidFill>
-                <a:latin typeface="Courier New"/>
-              </a:defRPr>
-            </a:pPr>
-            <a:r>
-              <a:t>from dijkstra import Dijkstra</a:t>
-            </a:r>
-          </a:p>
-          <a:p>
-            <a:pPr>
-              <a:spcAft>
-                <a:spcPts val="100"/>
-              </a:spcAft>
-              <a:defRPr sz="1300">
-                <a:solidFill>
-                  <a:srgbClr val="333333"/>
-                </a:solidFill>
-                <a:latin typeface="Courier New"/>
-              </a:defRPr>
-            </a:pPr>
-            <a:r>
-              <a:t>from navigator import Navigator</a:t>
-            </a:r>
-          </a:p>
-          <a:p>
-            <a:pPr>
-              <a:spcAft>
-                <a:spcPts val="100"/>
-              </a:spcAft>
-              <a:defRPr sz="1300">
-                <a:solidFill>
-                  <a:srgbClr val="333333"/>
-                </a:solidFill>
-                <a:latin typeface="Courier New"/>
-              </a:defRPr>
-            </a:pPr>
-          </a:p>
-          <a:p>
-            <a:pPr>
-              <a:spcAft>
-                <a:spcPts val="100"/>
-              </a:spcAft>
-              <a:defRPr sz="1300">
-                <a:solidFill>
-                  <a:srgbClr val="333333"/>
-                </a:solidFill>
-                <a:latin typeface="Courier New"/>
-              </a:defRPr>
-            </a:pPr>
-            <a:r>
-              <a:t>pathfinder = Dijkstra((0, 0), [(1, 1), (2, 2)])</a:t>
-            </a:r>
-          </a:p>
-          <a:p>
-            <a:pPr>
-              <a:spcAft>
-                <a:spcPts val="100"/>
-              </a:spcAft>
-              <a:defRPr sz="1300">
-                <a:solidFill>
-                  <a:srgbClr val="333333"/>
-                </a:solidFill>
-                <a:latin typeface="Courier New"/>
-              </a:defRPr>
-            </a:pPr>
-            <a:r>
-              <a:t>nav = Navigator(pathfinder)</a:t>
-            </a:r>
-          </a:p>
-          <a:p>
-            <a:pPr>
-              <a:spcAft>
-                <a:spcPts val="100"/>
-              </a:spcAft>
-              <a:defRPr sz="1300">
-                <a:solidFill>
-                  <a:srgbClr val="333333"/>
-                </a:solidFill>
-                <a:latin typeface="Courier New"/>
-              </a:defRPr>
-            </a:pPr>
-          </a:p>
-          <a:p>
-            <a:pPr>
-              <a:spcAft>
-                <a:spcPts val="100"/>
-              </a:spcAft>
-              <a:defRPr sz="1300">
-                <a:solidFill>
-                  <a:srgbClr val="333333"/>
-                </a:solidFill>
-                <a:latin typeface="Courier New"/>
-              </a:defRPr>
-            </a:pPr>
-            <a:r>
-              <a:t>destinations = [(2, 3), (0, 1), (3, 3)]</a:t>
-            </a:r>
-          </a:p>
-          <a:p>
-            <a:pPr>
-              <a:spcAft>
-                <a:spcPts val="100"/>
-              </a:spcAft>
-              <a:defRPr sz="1300">
-                <a:solidFill>
-                  <a:srgbClr val="333333"/>
-                </a:solidFill>
-                <a:latin typeface="Courier New"/>
-              </a:defRPr>
-            </a:pPr>
-            <a:r>
-              <a:t>for dest in destinations:</a:t>
-            </a:r>
-          </a:p>
-          <a:p>
-            <a:pPr>
-              <a:spcAft>
-                <a:spcPts val="100"/>
-              </a:spcAft>
-              <a:defRPr sz="1300">
-                <a:solidFill>
-                  <a:srgbClr val="333333"/>
-                </a:solidFill>
-                <a:latin typeface="Courier New"/>
-              </a:defRPr>
-            </a:pPr>
-            <a:r>
-              <a:t>    nav.go_to(dest)</a:t>
-            </a:r>
+                <a:spcPts val="400"/>
+              </a:spcAft>
+              <a:defRPr sz="2000" b="1">
+                <a:solidFill>
+                  <a:srgbClr val="1B3A5C"/>
+                </a:solidFill>
+                <a:latin typeface="Calibri"/>
+              </a:defRPr>
+            </a:pPr>
+            <a:r>
+              <a:t>What it does: picks the right underlying function, and for Dijkstra, slices off the first element so both branches return the same shape of result. Now drive_path() only ever calls compute_path(...) -- it never needs to know the differences exist.</a:t>
+            </a:r>
+          </a:p>
+          <a:p>
+            <a:pPr>
+              <a:spcAft>
+                <a:spcPts val="400"/>
+              </a:spcAft>
+              <a:defRPr sz="400" b="0">
+                <a:solidFill>
+                  <a:srgbClr val="000000"/>
+                </a:solidFill>
+                <a:latin typeface="Calibri"/>
+              </a:defRPr>
+            </a:pPr>
           </a:p>
         </p:txBody>
       </p:sp>
@@ -6902,6 +5879,409 @@
               </a:defRPr>
             </a:pPr>
             <a:r>
+              <a:t>The One-Argument Swap</a:t>
+            </a:r>
+          </a:p>
+        </p:txBody>
+      </p:sp>
+      <p:sp>
+        <p:nvSpPr>
+          <p:cNvPr id="4" name="Rounded Rectangle 3"/>
+          <p:cNvSpPr/>
+          <p:nvPr/>
+        </p:nvSpPr>
+        <p:spPr>
+          <a:xfrm>
+            <a:off x="548640" y="1371600"/>
+            <a:ext cx="10972800" cy="3017520"/>
+          </a:xfrm>
+          <a:prstGeom prst="roundRect">
+            <a:avLst/>
+          </a:prstGeom>
+          <a:solidFill>
+            <a:srgbClr val="F0F0F0"/>
+          </a:solidFill>
+          <a:ln w="12700">
+            <a:solidFill>
+              <a:srgbClr val="999999"/>
+            </a:solidFill>
+          </a:ln>
+        </p:spPr>
+        <p:style>
+          <a:lnRef idx="1">
+            <a:schemeClr val="accent1"/>
+          </a:lnRef>
+          <a:fillRef idx="3">
+            <a:schemeClr val="accent1"/>
+          </a:fillRef>
+          <a:effectRef idx="2">
+            <a:schemeClr val="accent1"/>
+          </a:effectRef>
+          <a:fontRef idx="minor">
+            <a:schemeClr val="lt1"/>
+          </a:fontRef>
+        </p:style>
+        <p:txBody>
+          <a:bodyPr rtlCol="0" anchor="ctr"/>
+          <a:lstStyle/>
+          <a:p>
+            <a:pPr algn="ctr"/>
+          </a:p>
+        </p:txBody>
+      </p:sp>
+      <p:sp>
+        <p:nvSpPr>
+          <p:cNvPr id="5" name="TextBox 4"/>
+          <p:cNvSpPr txBox="1"/>
+          <p:nvPr/>
+        </p:nvSpPr>
+        <p:spPr>
+          <a:xfrm>
+            <a:off x="731520" y="1463040"/>
+            <a:ext cx="10607040" cy="2834640"/>
+          </a:xfrm>
+          <a:prstGeom prst="rect">
+            <a:avLst/>
+          </a:prstGeom>
+          <a:noFill/>
+        </p:spPr>
+        <p:txBody>
+          <a:bodyPr wrap="square">
+            <a:spAutoFit/>
+          </a:bodyPr>
+          <a:lstStyle/>
+          <a:p>
+            <a:pPr>
+              <a:spcAft>
+                <a:spcPts val="100"/>
+              </a:spcAft>
+              <a:defRPr sz="1800">
+                <a:solidFill>
+                  <a:srgbClr val="333333"/>
+                </a:solidFill>
+                <a:latin typeface="Courier New"/>
+              </a:defRPr>
+            </a:pPr>
+            <a:r>
+              <a:t># ========================================</a:t>
+            </a:r>
+          </a:p>
+          <a:p>
+            <a:pPr>
+              <a:spcAft>
+                <a:spcPts val="100"/>
+              </a:spcAft>
+              <a:defRPr sz="1800">
+                <a:solidFill>
+                  <a:srgbClr val="333333"/>
+                </a:solidFill>
+                <a:latin typeface="Courier New"/>
+              </a:defRPr>
+            </a:pPr>
+            <a:r>
+              <a:t># BEFORE (Module 4 style -- Manhattan only)</a:t>
+            </a:r>
+          </a:p>
+          <a:p>
+            <a:pPr>
+              <a:spcAft>
+                <a:spcPts val="100"/>
+              </a:spcAft>
+              <a:defRPr sz="1800">
+                <a:solidFill>
+                  <a:srgbClr val="333333"/>
+                </a:solidFill>
+                <a:latin typeface="Courier New"/>
+              </a:defRPr>
+            </a:pPr>
+            <a:r>
+              <a:t># ========================================</a:t>
+            </a:r>
+          </a:p>
+          <a:p>
+            <a:pPr>
+              <a:spcAft>
+                <a:spcPts val="100"/>
+              </a:spcAft>
+              <a:defRPr sz="1800">
+                <a:solidFill>
+                  <a:srgbClr val="333333"/>
+                </a:solidFill>
+                <a:latin typeface="Courier New"/>
+              </a:defRPr>
+            </a:pPr>
+            <a:r>
+              <a:t>path = compute_manhattan_path(position, dest)</a:t>
+            </a:r>
+          </a:p>
+          <a:p>
+            <a:pPr>
+              <a:spcAft>
+                <a:spcPts val="100"/>
+              </a:spcAft>
+              <a:defRPr sz="1800">
+                <a:solidFill>
+                  <a:srgbClr val="333333"/>
+                </a:solidFill>
+                <a:latin typeface="Courier New"/>
+              </a:defRPr>
+            </a:pPr>
+            <a:r>
+              <a:t>position, heading = drive_path(path, position, heading)</a:t>
+            </a:r>
+          </a:p>
+          <a:p>
+            <a:pPr>
+              <a:spcAft>
+                <a:spcPts val="100"/>
+              </a:spcAft>
+              <a:defRPr sz="1800">
+                <a:solidFill>
+                  <a:srgbClr val="333333"/>
+                </a:solidFill>
+                <a:latin typeface="Courier New"/>
+              </a:defRPr>
+            </a:pPr>
+          </a:p>
+          <a:p>
+            <a:pPr>
+              <a:spcAft>
+                <a:spcPts val="100"/>
+              </a:spcAft>
+              <a:defRPr sz="1800">
+                <a:solidFill>
+                  <a:srgbClr val="333333"/>
+                </a:solidFill>
+                <a:latin typeface="Courier New"/>
+              </a:defRPr>
+            </a:pPr>
+          </a:p>
+          <a:p>
+            <a:pPr>
+              <a:spcAft>
+                <a:spcPts val="100"/>
+              </a:spcAft>
+              <a:defRPr sz="1800">
+                <a:solidFill>
+                  <a:srgbClr val="333333"/>
+                </a:solidFill>
+                <a:latin typeface="Courier New"/>
+              </a:defRPr>
+            </a:pPr>
+            <a:r>
+              <a:t># ========================================</a:t>
+            </a:r>
+          </a:p>
+          <a:p>
+            <a:pPr>
+              <a:spcAft>
+                <a:spcPts val="100"/>
+              </a:spcAft>
+              <a:defRPr sz="1800">
+                <a:solidFill>
+                  <a:srgbClr val="333333"/>
+                </a:solidFill>
+                <a:latin typeface="Courier New"/>
+              </a:defRPr>
+            </a:pPr>
+            <a:r>
+              <a:t># AFTER (Module 5 -- either algorithm via one argument)</a:t>
+            </a:r>
+          </a:p>
+          <a:p>
+            <a:pPr>
+              <a:spcAft>
+                <a:spcPts val="100"/>
+              </a:spcAft>
+              <a:defRPr sz="1800">
+                <a:solidFill>
+                  <a:srgbClr val="333333"/>
+                </a:solidFill>
+                <a:latin typeface="Courier New"/>
+              </a:defRPr>
+            </a:pPr>
+            <a:r>
+              <a:t># ========================================</a:t>
+            </a:r>
+          </a:p>
+          <a:p>
+            <a:pPr>
+              <a:spcAft>
+                <a:spcPts val="100"/>
+              </a:spcAft>
+              <a:defRPr sz="1800">
+                <a:solidFill>
+                  <a:srgbClr val="333333"/>
+                </a:solidFill>
+                <a:latin typeface="Courier New"/>
+              </a:defRPr>
+            </a:pPr>
+            <a:r>
+              <a:t>path = compute_path("dijkstra", position, dest, blocked)   # &lt;- only this line changed</a:t>
+            </a:r>
+          </a:p>
+          <a:p>
+            <a:pPr>
+              <a:spcAft>
+                <a:spcPts val="100"/>
+              </a:spcAft>
+              <a:defRPr sz="1800">
+                <a:solidFill>
+                  <a:srgbClr val="333333"/>
+                </a:solidFill>
+                <a:latin typeface="Courier New"/>
+              </a:defRPr>
+            </a:pPr>
+            <a:r>
+              <a:t>position, heading = drive_path(path, position, heading)</a:t>
+            </a:r>
+          </a:p>
+        </p:txBody>
+      </p:sp>
+      <p:sp>
+        <p:nvSpPr>
+          <p:cNvPr id="6" name="TextBox 5"/>
+          <p:cNvSpPr txBox="1"/>
+          <p:nvPr/>
+        </p:nvSpPr>
+        <p:spPr>
+          <a:xfrm>
+            <a:off x="548640" y="4526280"/>
+            <a:ext cx="10972800" cy="365760"/>
+          </a:xfrm>
+          <a:prstGeom prst="rect">
+            <a:avLst/>
+          </a:prstGeom>
+          <a:noFill/>
+        </p:spPr>
+        <p:txBody>
+          <a:bodyPr wrap="square">
+            <a:spAutoFit/>
+          </a:bodyPr>
+          <a:lstStyle/>
+          <a:p>
+            <a:pPr>
+              <a:spcAft>
+                <a:spcPts val="400"/>
+              </a:spcAft>
+              <a:defRPr sz="1700" b="0">
+                <a:solidFill>
+                  <a:srgbClr val="000000"/>
+                </a:solidFill>
+                <a:latin typeface="Calibri"/>
+              </a:defRPr>
+            </a:pPr>
+            <a:r>
+              <a:t>That's it. Everything downstream -- drive_path(path, position, heading) -- is completely unaware which algorithm ran.</a:t>
+            </a:r>
+          </a:p>
+          <a:p>
+            <a:pPr>
+              <a:spcAft>
+                <a:spcPts val="400"/>
+              </a:spcAft>
+              <a:defRPr sz="400" b="0">
+                <a:solidFill>
+                  <a:srgbClr val="000000"/>
+                </a:solidFill>
+                <a:latin typeface="Calibri"/>
+              </a:defRPr>
+            </a:pPr>
+          </a:p>
+        </p:txBody>
+      </p:sp>
+    </p:spTree>
+  </p:cSld>
+  <p:clrMapOvr>
+    <a:masterClrMapping/>
+  </p:clrMapOvr>
+</p:sld>
+</file>
+
+<file path=ppt/slides/slide8.xml><?xml version="1.0" encoding="utf-8"?>
+<p:sld xmlns:a="http://schemas.openxmlformats.org/drawingml/2006/main" xmlns:p="http://schemas.openxmlformats.org/presentationml/2006/main" xmlns:r="http://schemas.openxmlformats.org/officeDocument/2006/relationships">
+  <p:cSld>
+    <p:spTree>
+      <p:nvGrpSpPr>
+        <p:cNvPr id="1" name=""/>
+        <p:cNvGrpSpPr/>
+        <p:nvPr/>
+      </p:nvGrpSpPr>
+      <p:grpSpPr/>
+      <p:sp>
+        <p:nvSpPr>
+          <p:cNvPr id="2" name="Rectangle 1"/>
+          <p:cNvSpPr/>
+          <p:nvPr/>
+        </p:nvSpPr>
+        <p:spPr>
+          <a:xfrm>
+            <a:off x="0" y="0"/>
+            <a:ext cx="12191695" cy="1097280"/>
+          </a:xfrm>
+          <a:prstGeom prst="rect">
+            <a:avLst/>
+          </a:prstGeom>
+          <a:solidFill>
+            <a:srgbClr val="1B3A5C"/>
+          </a:solidFill>
+          <a:ln>
+            <a:noFill/>
+          </a:ln>
+        </p:spPr>
+        <p:style>
+          <a:lnRef idx="1">
+            <a:schemeClr val="accent1"/>
+          </a:lnRef>
+          <a:fillRef idx="3">
+            <a:schemeClr val="accent1"/>
+          </a:fillRef>
+          <a:effectRef idx="2">
+            <a:schemeClr val="accent1"/>
+          </a:effectRef>
+          <a:fontRef idx="minor">
+            <a:schemeClr val="lt1"/>
+          </a:fontRef>
+        </p:style>
+        <p:txBody>
+          <a:bodyPr rtlCol="0" anchor="ctr"/>
+          <a:lstStyle/>
+          <a:p>
+            <a:pPr algn="ctr"/>
+          </a:p>
+        </p:txBody>
+      </p:sp>
+      <p:sp>
+        <p:nvSpPr>
+          <p:cNvPr id="3" name="TextBox 2"/>
+          <p:cNvSpPr txBox="1"/>
+          <p:nvPr/>
+        </p:nvSpPr>
+        <p:spPr>
+          <a:xfrm>
+            <a:off x="548640" y="137160"/>
+            <a:ext cx="10972800" cy="822960"/>
+          </a:xfrm>
+          <a:prstGeom prst="rect">
+            <a:avLst/>
+          </a:prstGeom>
+          <a:noFill/>
+        </p:spPr>
+        <p:txBody>
+          <a:bodyPr wrap="square">
+            <a:spAutoFit/>
+          </a:bodyPr>
+          <a:lstStyle/>
+          <a:p>
+            <a:pPr>
+              <a:defRPr sz="3200" b="1">
+                <a:solidFill>
+                  <a:srgbClr val="FFFFFF"/>
+                </a:solidFill>
+                <a:latin typeface="Calibri"/>
+              </a:defRPr>
+            </a:pPr>
+            <a:r>
               <a:t>Side-by-Side Comparison</a:t>
             </a:r>
           </a:p>
@@ -6941,7 +6321,7 @@
               </a:defRPr>
             </a:pPr>
             <a:r>
-              <a:t>Running both pathfinders on the same destinations with blocked nodes [(1,1), (2,2)]:</a:t>
+              <a:t>Running compute_path() on the same destinations with blocked nodes [(1,1), (2,2)]:</a:t>
             </a:r>
           </a:p>
           <a:p>
@@ -7371,464 +6751,6 @@
 </p:sld>
 </file>
 
-<file path=ppt/slides/slide8.xml><?xml version="1.0" encoding="utf-8"?>
-<p:sld xmlns:a="http://schemas.openxmlformats.org/drawingml/2006/main" xmlns:p="http://schemas.openxmlformats.org/presentationml/2006/main" xmlns:r="http://schemas.openxmlformats.org/officeDocument/2006/relationships">
-  <p:cSld>
-    <p:spTree>
-      <p:nvGrpSpPr>
-        <p:cNvPr id="1" name=""/>
-        <p:cNvGrpSpPr/>
-        <p:nvPr/>
-      </p:nvGrpSpPr>
-      <p:grpSpPr/>
-      <p:sp>
-        <p:nvSpPr>
-          <p:cNvPr id="2" name="Rectangle 1"/>
-          <p:cNvSpPr/>
-          <p:nvPr/>
-        </p:nvSpPr>
-        <p:spPr>
-          <a:xfrm>
-            <a:off x="0" y="0"/>
-            <a:ext cx="12191695" cy="1097280"/>
-          </a:xfrm>
-          <a:prstGeom prst="rect">
-            <a:avLst/>
-          </a:prstGeom>
-          <a:solidFill>
-            <a:srgbClr val="1B3A5C"/>
-          </a:solidFill>
-          <a:ln>
-            <a:noFill/>
-          </a:ln>
-        </p:spPr>
-        <p:style>
-          <a:lnRef idx="1">
-            <a:schemeClr val="accent1"/>
-          </a:lnRef>
-          <a:fillRef idx="3">
-            <a:schemeClr val="accent1"/>
-          </a:fillRef>
-          <a:effectRef idx="2">
-            <a:schemeClr val="accent1"/>
-          </a:effectRef>
-          <a:fontRef idx="minor">
-            <a:schemeClr val="lt1"/>
-          </a:fontRef>
-        </p:style>
-        <p:txBody>
-          <a:bodyPr rtlCol="0" anchor="ctr"/>
-          <a:lstStyle/>
-          <a:p>
-            <a:pPr algn="ctr"/>
-          </a:p>
-        </p:txBody>
-      </p:sp>
-      <p:sp>
-        <p:nvSpPr>
-          <p:cNvPr id="3" name="TextBox 2"/>
-          <p:cNvSpPr txBox="1"/>
-          <p:nvPr/>
-        </p:nvSpPr>
-        <p:spPr>
-          <a:xfrm>
-            <a:off x="548640" y="137160"/>
-            <a:ext cx="10972800" cy="822960"/>
-          </a:xfrm>
-          <a:prstGeom prst="rect">
-            <a:avLst/>
-          </a:prstGeom>
-          <a:noFill/>
-        </p:spPr>
-        <p:txBody>
-          <a:bodyPr wrap="square">
-            <a:spAutoFit/>
-          </a:bodyPr>
-          <a:lstStyle/>
-          <a:p>
-            <a:pPr>
-              <a:defRPr sz="3200" b="1">
-                <a:solidFill>
-                  <a:srgbClr val="FFFFFF"/>
-                </a:solidFill>
-                <a:latin typeface="Calibri"/>
-              </a:defRPr>
-            </a:pPr>
-            <a:r>
-              <a:t>What Navigator Needs from a Pathfinder</a:t>
-            </a:r>
-          </a:p>
-        </p:txBody>
-      </p:sp>
-      <p:sp>
-        <p:nvSpPr>
-          <p:cNvPr id="4" name="TextBox 3"/>
-          <p:cNvSpPr txBox="1"/>
-          <p:nvPr/>
-        </p:nvSpPr>
-        <p:spPr>
-          <a:xfrm>
-            <a:off x="548640" y="1371600"/>
-            <a:ext cx="10972800" cy="365760"/>
-          </a:xfrm>
-          <a:prstGeom prst="rect">
-            <a:avLst/>
-          </a:prstGeom>
-          <a:noFill/>
-        </p:spPr>
-        <p:txBody>
-          <a:bodyPr wrap="square">
-            <a:spAutoFit/>
-          </a:bodyPr>
-          <a:lstStyle/>
-          <a:p>
-            <a:pPr>
-              <a:defRPr sz="1800" b="1">
-                <a:solidFill>
-                  <a:srgbClr val="1B3A5C"/>
-                </a:solidFill>
-                <a:latin typeface="Calibri"/>
-              </a:defRPr>
-            </a:pPr>
-            <a:r>
-              <a:t>Let's look at how Navigator uses the pathfinder:</a:t>
-            </a:r>
-          </a:p>
-        </p:txBody>
-      </p:sp>
-      <p:sp>
-        <p:nvSpPr>
-          <p:cNvPr id="5" name="Rounded Rectangle 4"/>
-          <p:cNvSpPr/>
-          <p:nvPr/>
-        </p:nvSpPr>
-        <p:spPr>
-          <a:xfrm>
-            <a:off x="548640" y="1645920"/>
-            <a:ext cx="5669280" cy="2560320"/>
-          </a:xfrm>
-          <a:prstGeom prst="roundRect">
-            <a:avLst/>
-          </a:prstGeom>
-          <a:solidFill>
-            <a:srgbClr val="F0F0F0"/>
-          </a:solidFill>
-          <a:ln w="12700">
-            <a:solidFill>
-              <a:srgbClr val="999999"/>
-            </a:solidFill>
-          </a:ln>
-        </p:spPr>
-        <p:style>
-          <a:lnRef idx="1">
-            <a:schemeClr val="accent1"/>
-          </a:lnRef>
-          <a:fillRef idx="3">
-            <a:schemeClr val="accent1"/>
-          </a:fillRef>
-          <a:effectRef idx="2">
-            <a:schemeClr val="accent1"/>
-          </a:effectRef>
-          <a:fontRef idx="minor">
-            <a:schemeClr val="lt1"/>
-          </a:fontRef>
-        </p:style>
-        <p:txBody>
-          <a:bodyPr rtlCol="0" anchor="ctr"/>
-          <a:lstStyle/>
-          <a:p>
-            <a:pPr algn="ctr"/>
-          </a:p>
-        </p:txBody>
-      </p:sp>
-      <p:sp>
-        <p:nvSpPr>
-          <p:cNvPr id="6" name="TextBox 5"/>
-          <p:cNvSpPr txBox="1"/>
-          <p:nvPr/>
-        </p:nvSpPr>
-        <p:spPr>
-          <a:xfrm>
-            <a:off x="731520" y="1737360"/>
-            <a:ext cx="5303520" cy="2377440"/>
-          </a:xfrm>
-          <a:prstGeom prst="rect">
-            <a:avLst/>
-          </a:prstGeom>
-          <a:noFill/>
-        </p:spPr>
-        <p:txBody>
-          <a:bodyPr wrap="square">
-            <a:spAutoFit/>
-          </a:bodyPr>
-          <a:lstStyle/>
-          <a:p>
-            <a:pPr>
-              <a:spcAft>
-                <a:spcPts val="100"/>
-              </a:spcAft>
-              <a:defRPr sz="1300">
-                <a:solidFill>
-                  <a:srgbClr val="333333"/>
-                </a:solidFill>
-                <a:latin typeface="Courier New"/>
-              </a:defRPr>
-            </a:pPr>
-            <a:r>
-              <a:t>class Navigator:</a:t>
-            </a:r>
-          </a:p>
-          <a:p>
-            <a:pPr>
-              <a:spcAft>
-                <a:spcPts val="100"/>
-              </a:spcAft>
-              <a:defRPr sz="1300">
-                <a:solidFill>
-                  <a:srgbClr val="333333"/>
-                </a:solidFill>
-                <a:latin typeface="Courier New"/>
-              </a:defRPr>
-            </a:pPr>
-            <a:r>
-              <a:t>    def __init__(self, pathfinder):</a:t>
-            </a:r>
-          </a:p>
-          <a:p>
-            <a:pPr>
-              <a:spcAft>
-                <a:spcPts val="100"/>
-              </a:spcAft>
-              <a:defRPr sz="1300">
-                <a:solidFill>
-                  <a:srgbClr val="333333"/>
-                </a:solidFill>
-                <a:latin typeface="Courier New"/>
-              </a:defRPr>
-            </a:pPr>
-            <a:r>
-              <a:t>        self.pathfinder = pathfinder</a:t>
-            </a:r>
-          </a:p>
-          <a:p>
-            <a:pPr>
-              <a:spcAft>
-                <a:spcPts val="100"/>
-              </a:spcAft>
-              <a:defRPr sz="1300">
-                <a:solidFill>
-                  <a:srgbClr val="333333"/>
-                </a:solidFill>
-                <a:latin typeface="Courier New"/>
-              </a:defRPr>
-            </a:pPr>
-          </a:p>
-          <a:p>
-            <a:pPr>
-              <a:spcAft>
-                <a:spcPts val="100"/>
-              </a:spcAft>
-              <a:defRPr sz="1300">
-                <a:solidFill>
-                  <a:srgbClr val="333333"/>
-                </a:solidFill>
-                <a:latin typeface="Courier New"/>
-              </a:defRPr>
-            </a:pPr>
-            <a:r>
-              <a:t>    def go_to(self, destination):</a:t>
-            </a:r>
-          </a:p>
-          <a:p>
-            <a:pPr>
-              <a:spcAft>
-                <a:spcPts val="100"/>
-              </a:spcAft>
-              <a:defRPr sz="1300">
-                <a:solidFill>
-                  <a:srgbClr val="333333"/>
-                </a:solidFill>
-                <a:latin typeface="Courier New"/>
-              </a:defRPr>
-            </a:pPr>
-            <a:r>
-              <a:t>        path = self.pathfinder.compute_path(destination)</a:t>
-            </a:r>
-          </a:p>
-          <a:p>
-            <a:pPr>
-              <a:spcAft>
-                <a:spcPts val="100"/>
-              </a:spcAft>
-              <a:defRPr sz="1300">
-                <a:solidFill>
-                  <a:srgbClr val="333333"/>
-                </a:solidFill>
-                <a:latin typeface="Courier New"/>
-              </a:defRPr>
-            </a:pPr>
-            <a:r>
-              <a:t>        for i in range(len(path) - 1):</a:t>
-            </a:r>
-          </a:p>
-          <a:p>
-            <a:pPr>
-              <a:spcAft>
-                <a:spcPts val="100"/>
-              </a:spcAft>
-              <a:defRPr sz="1300">
-                <a:solidFill>
-                  <a:srgbClr val="333333"/>
-                </a:solidFill>
-                <a:latin typeface="Courier New"/>
-              </a:defRPr>
-            </a:pPr>
-            <a:r>
-              <a:t>            current = path[i]</a:t>
-            </a:r>
-          </a:p>
-          <a:p>
-            <a:pPr>
-              <a:spcAft>
-                <a:spcPts val="100"/>
-              </a:spcAft>
-              <a:defRPr sz="1300">
-                <a:solidFill>
-                  <a:srgbClr val="333333"/>
-                </a:solidFill>
-                <a:latin typeface="Courier New"/>
-              </a:defRPr>
-            </a:pPr>
-            <a:r>
-              <a:t>            next_node = path[i + 1]</a:t>
-            </a:r>
-          </a:p>
-          <a:p>
-            <a:pPr>
-              <a:spcAft>
-                <a:spcPts val="100"/>
-              </a:spcAft>
-              <a:defRPr sz="1300">
-                <a:solidFill>
-                  <a:srgbClr val="333333"/>
-                </a:solidFill>
-                <a:latin typeface="Courier New"/>
-              </a:defRPr>
-            </a:pPr>
-            <a:r>
-              <a:t>            self.drive_segment(current, next_node)</a:t>
-            </a:r>
-          </a:p>
-        </p:txBody>
-      </p:sp>
-      <p:sp>
-        <p:nvSpPr>
-          <p:cNvPr id="7" name="TextBox 6"/>
-          <p:cNvSpPr txBox="1"/>
-          <p:nvPr/>
-        </p:nvSpPr>
-        <p:spPr>
-          <a:xfrm>
-            <a:off x="6583680" y="1645920"/>
-            <a:ext cx="5029200" cy="2560320"/>
-          </a:xfrm>
-          <a:prstGeom prst="rect">
-            <a:avLst/>
-          </a:prstGeom>
-          <a:noFill/>
-        </p:spPr>
-        <p:txBody>
-          <a:bodyPr wrap="square">
-            <a:spAutoFit/>
-          </a:bodyPr>
-          <a:lstStyle/>
-          <a:p>
-            <a:pPr>
-              <a:defRPr sz="1600" b="0">
-                <a:solidFill>
-                  <a:srgbClr val="000000"/>
-                </a:solidFill>
-                <a:latin typeface="Calibri"/>
-              </a:defRPr>
-            </a:pPr>
-            <a:r>
-              <a:t>Navigator calls self.pathfinder.compute_path(destination) and expects a list of tuples back. That's the entire contract.</a:t>
-            </a:r>
-          </a:p>
-          <a:p>
-            <a:pPr>
-              <a:spcAft>
-                <a:spcPts val="400"/>
-              </a:spcAft>
-              <a:defRPr sz="1600" b="0">
-                <a:solidFill>
-                  <a:srgbClr val="000000"/>
-                </a:solidFill>
-                <a:latin typeface="Calibri"/>
-              </a:defRPr>
-            </a:pPr>
-            <a:r>
-              <a:t>Manhattan fulfills this contract</a:t>
-            </a:r>
-          </a:p>
-          <a:p>
-            <a:pPr>
-              <a:spcAft>
-                <a:spcPts val="400"/>
-              </a:spcAft>
-              <a:defRPr sz="1600" b="0">
-                <a:solidFill>
-                  <a:srgbClr val="000000"/>
-                </a:solidFill>
-                <a:latin typeface="Calibri"/>
-              </a:defRPr>
-            </a:pPr>
-            <a:r>
-              <a:t>Dijkstra fulfills this contract</a:t>
-            </a:r>
-          </a:p>
-          <a:p>
-            <a:pPr>
-              <a:spcAft>
-                <a:spcPts val="400"/>
-              </a:spcAft>
-              <a:defRPr sz="1600" b="0">
-                <a:solidFill>
-                  <a:srgbClr val="000000"/>
-                </a:solidFill>
-                <a:latin typeface="Calibri"/>
-              </a:defRPr>
-            </a:pPr>
-            <a:r>
-              <a:t>Any future pathfinder that returns a list of tuples will also work!</a:t>
-            </a:r>
-          </a:p>
-          <a:p>
-            <a:pPr>
-              <a:spcAft>
-                <a:spcPts val="400"/>
-              </a:spcAft>
-              <a:defRPr sz="1600" b="0">
-                <a:solidFill>
-                  <a:srgbClr val="000000"/>
-                </a:solidFill>
-                <a:latin typeface="Calibri"/>
-              </a:defRPr>
-            </a:pPr>
-            <a:r>
-              <a:t>This is called programming to an interface — one of the most important ideas in software design.</a:t>
-            </a:r>
-          </a:p>
-        </p:txBody>
-      </p:sp>
-    </p:spTree>
-  </p:cSld>
-  <p:clrMapOvr>
-    <a:masterClrMapping/>
-  </p:clrMapOvr>
-</p:sld>
-</file>
-
 <file path=ppt/slides/slide9.xml><?xml version="1.0" encoding="utf-8"?>
 <p:sld xmlns:a="http://schemas.openxmlformats.org/drawingml/2006/main" xmlns:p="http://schemas.openxmlformats.org/presentationml/2006/main" xmlns:r="http://schemas.openxmlformats.org/officeDocument/2006/relationships">
   <p:cSld>
@@ -8071,7 +6993,7 @@
                         </a:defRPr>
                       </a:pPr>
                       <a:r>
-                        <a:t>Returns [start] — a one-element list</a:t>
+                        <a:t>Returns `[]` — no steps needed</a:t>
                       </a:r>
                     </a:p>
                   </a:txBody>
@@ -8111,7 +7033,7 @@
                         </a:defRPr>
                       </a:pPr>
                       <a:r>
-                        <a:t>Returns [start, dest] — two elements</a:t>
+                        <a:t>Returns `[dest]` — one element</a:t>
                       </a:r>
                     </a:p>
                   </a:txBody>
@@ -8251,193 +7173,6 @@
         <p:spPr>
           <a:xfrm>
             <a:off x="548640" y="3749040"/>
-            <a:ext cx="10972800" cy="365760"/>
-          </a:xfrm>
-          <a:prstGeom prst="rect">
-            <a:avLst/>
-          </a:prstGeom>
-          <a:noFill/>
-        </p:spPr>
-        <p:txBody>
-          <a:bodyPr wrap="square">
-            <a:spAutoFit/>
-          </a:bodyPr>
-          <a:lstStyle/>
-          <a:p>
-            <a:pPr>
-              <a:spcAft>
-                <a:spcPts val="400"/>
-              </a:spcAft>
-              <a:defRPr sz="1800" b="1">
-                <a:solidFill>
-                  <a:srgbClr val="1B3A5C"/>
-                </a:solidFill>
-                <a:latin typeface="Calibri"/>
-              </a:defRPr>
-            </a:pPr>
-            <a:r>
-              <a:t>Defensive check you can add:</a:t>
-            </a:r>
-          </a:p>
-        </p:txBody>
-      </p:sp>
-      <p:sp>
-        <p:nvSpPr>
-          <p:cNvPr id="7" name="Rounded Rectangle 6"/>
-          <p:cNvSpPr/>
-          <p:nvPr/>
-        </p:nvSpPr>
-        <p:spPr>
-          <a:xfrm>
-            <a:off x="548640" y="3749040"/>
-            <a:ext cx="10972800" cy="1417320"/>
-          </a:xfrm>
-          <a:prstGeom prst="roundRect">
-            <a:avLst/>
-          </a:prstGeom>
-          <a:solidFill>
-            <a:srgbClr val="F0F0F0"/>
-          </a:solidFill>
-          <a:ln w="12700">
-            <a:solidFill>
-              <a:srgbClr val="999999"/>
-            </a:solidFill>
-          </a:ln>
-        </p:spPr>
-        <p:style>
-          <a:lnRef idx="1">
-            <a:schemeClr val="accent1"/>
-          </a:lnRef>
-          <a:fillRef idx="3">
-            <a:schemeClr val="accent1"/>
-          </a:fillRef>
-          <a:effectRef idx="2">
-            <a:schemeClr val="accent1"/>
-          </a:effectRef>
-          <a:fontRef idx="minor">
-            <a:schemeClr val="lt1"/>
-          </a:fontRef>
-        </p:style>
-        <p:txBody>
-          <a:bodyPr rtlCol="0" anchor="ctr"/>
-          <a:lstStyle/>
-          <a:p>
-            <a:pPr algn="ctr"/>
-          </a:p>
-        </p:txBody>
-      </p:sp>
-      <p:sp>
-        <p:nvSpPr>
-          <p:cNvPr id="8" name="TextBox 7"/>
-          <p:cNvSpPr txBox="1"/>
-          <p:nvPr/>
-        </p:nvSpPr>
-        <p:spPr>
-          <a:xfrm>
-            <a:off x="731520" y="3840480"/>
-            <a:ext cx="10607040" cy="1234440"/>
-          </a:xfrm>
-          <a:prstGeom prst="rect">
-            <a:avLst/>
-          </a:prstGeom>
-          <a:noFill/>
-        </p:spPr>
-        <p:txBody>
-          <a:bodyPr wrap="square">
-            <a:spAutoFit/>
-          </a:bodyPr>
-          <a:lstStyle/>
-          <a:p>
-            <a:pPr>
-              <a:spcAft>
-                <a:spcPts val="100"/>
-              </a:spcAft>
-              <a:defRPr sz="1300">
-                <a:solidFill>
-                  <a:srgbClr val="333333"/>
-                </a:solidFill>
-                <a:latin typeface="Courier New"/>
-              </a:defRPr>
-            </a:pPr>
-            <a:r>
-              <a:t>def compute_path(self, destination):</a:t>
-            </a:r>
-          </a:p>
-          <a:p>
-            <a:pPr>
-              <a:spcAft>
-                <a:spcPts val="100"/>
-              </a:spcAft>
-              <a:defRPr sz="1300">
-                <a:solidFill>
-                  <a:srgbClr val="333333"/>
-                </a:solidFill>
-                <a:latin typeface="Courier New"/>
-              </a:defRPr>
-            </a:pPr>
-            <a:r>
-              <a:t>    if destination not in self.graph:</a:t>
-            </a:r>
-          </a:p>
-          <a:p>
-            <a:pPr>
-              <a:spcAft>
-                <a:spcPts val="100"/>
-              </a:spcAft>
-              <a:defRPr sz="1300">
-                <a:solidFill>
-                  <a:srgbClr val="333333"/>
-                </a:solidFill>
-                <a:latin typeface="Courier New"/>
-              </a:defRPr>
-            </a:pPr>
-            <a:r>
-              <a:t>        print("Destination is blocked or invalid!")</a:t>
-            </a:r>
-          </a:p>
-          <a:p>
-            <a:pPr>
-              <a:spcAft>
-                <a:spcPts val="100"/>
-              </a:spcAft>
-              <a:defRPr sz="1300">
-                <a:solidFill>
-                  <a:srgbClr val="333333"/>
-                </a:solidFill>
-                <a:latin typeface="Courier New"/>
-              </a:defRPr>
-            </a:pPr>
-            <a:r>
-              <a:t>        return []</a:t>
-            </a:r>
-          </a:p>
-          <a:p>
-            <a:pPr>
-              <a:spcAft>
-                <a:spcPts val="100"/>
-              </a:spcAft>
-              <a:defRPr sz="1300">
-                <a:solidFill>
-                  <a:srgbClr val="333333"/>
-                </a:solidFill>
-                <a:latin typeface="Courier New"/>
-              </a:defRPr>
-            </a:pPr>
-            <a:r>
-              <a:t>    # ... rest of algorithm</a:t>
-            </a:r>
-          </a:p>
-        </p:txBody>
-      </p:sp>
-      <p:sp>
-        <p:nvSpPr>
-          <p:cNvPr id="9" name="TextBox 8"/>
-          <p:cNvSpPr txBox="1"/>
-          <p:nvPr/>
-        </p:nvSpPr>
-        <p:spPr>
-          <a:xfrm>
-            <a:off x="548640" y="5303520"/>
             <a:ext cx="10972800" cy="365760"/>
           </a:xfrm>
           <a:prstGeom prst="rect">
